--- a/figures/DOA_System_Model.pptx
+++ b/figures/DOA_System_Model.pptx
@@ -2,12 +2,13 @@
 <file path=ppt/presentation.xml><?xml version="1.0" encoding="utf-8"?>
 <p:presentation xmlns:a="http://schemas.openxmlformats.org/drawingml/2006/main" xmlns:r="http://schemas.openxmlformats.org/officeDocument/2006/relationships" xmlns:p="http://schemas.openxmlformats.org/presentationml/2006/main" saveSubsetFonts="1">
   <p:sldMasterIdLst>
-    <p:sldMasterId id="2147483672" r:id="rId1"/>
+    <p:sldMasterId id="2147483696" r:id="rId1"/>
   </p:sldMasterIdLst>
   <p:sldIdLst>
-    <p:sldId id="256" r:id="rId2"/>
+    <p:sldId id="257" r:id="rId2"/>
+    <p:sldId id="256" r:id="rId3"/>
   </p:sldIdLst>
-  <p:sldSz cx="3060700" cy="3600450"/>
+  <p:sldSz cx="6400800" cy="3600450"/>
   <p:notesSz cx="6858000" cy="9144000"/>
   <p:defaultTextStyle>
     <a:defPPr>
@@ -112,7 +113,7 @@
             <a:srgbClr val="A4A3A4"/>
           </p15:clr>
         </p15:guide>
-        <p15:guide id="2" pos="964" userDrawn="1">
+        <p15:guide id="2" pos="2016" userDrawn="1">
           <p15:clr>
             <a:srgbClr val="A4A3A4"/>
           </p15:clr>
@@ -152,15 +153,15 @@
         </p:nvSpPr>
         <p:spPr>
           <a:xfrm>
-            <a:off x="229553" y="589241"/>
-            <a:ext cx="2601595" cy="1253490"/>
+            <a:off x="800100" y="589241"/>
+            <a:ext cx="4800600" cy="1253490"/>
           </a:xfrm>
         </p:spPr>
         <p:txBody>
           <a:bodyPr anchor="b"/>
           <a:lstStyle>
             <a:lvl1pPr algn="ctr">
-              <a:defRPr sz="2008"/>
+              <a:defRPr sz="3150"/>
             </a:lvl1pPr>
           </a:lstStyle>
           <a:p>
@@ -184,8 +185,8 @@
         </p:nvSpPr>
         <p:spPr>
           <a:xfrm>
-            <a:off x="382588" y="1891070"/>
-            <a:ext cx="2295525" cy="869275"/>
+            <a:off x="800100" y="1891070"/>
+            <a:ext cx="4800600" cy="869275"/>
           </a:xfrm>
         </p:spPr>
         <p:txBody>
@@ -193,39 +194,39 @@
           <a:lstStyle>
             <a:lvl1pPr marL="0" indent="0" algn="ctr">
               <a:buNone/>
-              <a:defRPr sz="803"/>
+              <a:defRPr sz="1260"/>
             </a:lvl1pPr>
-            <a:lvl2pPr marL="153025" indent="0" algn="ctr">
+            <a:lvl2pPr marL="240030" indent="0" algn="ctr">
               <a:buNone/>
-              <a:defRPr sz="669"/>
+              <a:defRPr sz="1050"/>
             </a:lvl2pPr>
-            <a:lvl3pPr marL="306050" indent="0" algn="ctr">
+            <a:lvl3pPr marL="480060" indent="0" algn="ctr">
               <a:buNone/>
-              <a:defRPr sz="602"/>
+              <a:defRPr sz="945"/>
             </a:lvl3pPr>
-            <a:lvl4pPr marL="459075" indent="0" algn="ctr">
+            <a:lvl4pPr marL="720090" indent="0" algn="ctr">
               <a:buNone/>
-              <a:defRPr sz="536"/>
+              <a:defRPr sz="840"/>
             </a:lvl4pPr>
-            <a:lvl5pPr marL="612099" indent="0" algn="ctr">
+            <a:lvl5pPr marL="960120" indent="0" algn="ctr">
               <a:buNone/>
-              <a:defRPr sz="536"/>
+              <a:defRPr sz="840"/>
             </a:lvl5pPr>
-            <a:lvl6pPr marL="765124" indent="0" algn="ctr">
+            <a:lvl6pPr marL="1200150" indent="0" algn="ctr">
               <a:buNone/>
-              <a:defRPr sz="536"/>
+              <a:defRPr sz="840"/>
             </a:lvl6pPr>
-            <a:lvl7pPr marL="918149" indent="0" algn="ctr">
+            <a:lvl7pPr marL="1440180" indent="0" algn="ctr">
               <a:buNone/>
-              <a:defRPr sz="536"/>
+              <a:defRPr sz="840"/>
             </a:lvl7pPr>
-            <a:lvl8pPr marL="1071174" indent="0" algn="ctr">
+            <a:lvl8pPr marL="1680210" indent="0" algn="ctr">
               <a:buNone/>
-              <a:defRPr sz="536"/>
+              <a:defRPr sz="840"/>
             </a:lvl8pPr>
-            <a:lvl9pPr marL="1224199" indent="0" algn="ctr">
+            <a:lvl9pPr marL="1920240" indent="0" algn="ctr">
               <a:buNone/>
-              <a:defRPr sz="536"/>
+              <a:defRPr sz="840"/>
             </a:lvl9pPr>
           </a:lstStyle>
           <a:p>
@@ -254,7 +255,7 @@
           <a:p>
             <a:fld id="{095AB915-DB53-41BD-A85E-FD7AC785D22D}" type="datetimeFigureOut">
               <a:rPr lang="LID4096" smtClean="0"/>
-              <a:t>02/28/2025</a:t>
+              <a:t>04/24/2026</a:t>
             </a:fld>
             <a:endParaRPr lang="LID4096"/>
           </a:p>
@@ -305,7 +306,7 @@
     </p:spTree>
     <p:extLst>
       <p:ext uri="{BB962C8B-B14F-4D97-AF65-F5344CB8AC3E}">
-        <p14:creationId xmlns:p14="http://schemas.microsoft.com/office/powerpoint/2010/main" val="3453062230"/>
+        <p14:creationId xmlns:p14="http://schemas.microsoft.com/office/powerpoint/2010/main" val="810138598"/>
       </p:ext>
     </p:extLst>
   </p:cSld>
@@ -424,7 +425,7 @@
           <a:p>
             <a:fld id="{095AB915-DB53-41BD-A85E-FD7AC785D22D}" type="datetimeFigureOut">
               <a:rPr lang="LID4096" smtClean="0"/>
-              <a:t>02/28/2025</a:t>
+              <a:t>04/24/2026</a:t>
             </a:fld>
             <a:endParaRPr lang="LID4096"/>
           </a:p>
@@ -475,7 +476,7 @@
     </p:spTree>
     <p:extLst>
       <p:ext uri="{BB962C8B-B14F-4D97-AF65-F5344CB8AC3E}">
-        <p14:creationId xmlns:p14="http://schemas.microsoft.com/office/powerpoint/2010/main" val="3239130587"/>
+        <p14:creationId xmlns:p14="http://schemas.microsoft.com/office/powerpoint/2010/main" val="4031899904"/>
       </p:ext>
     </p:extLst>
   </p:cSld>
@@ -514,8 +515,8 @@
         </p:nvSpPr>
         <p:spPr>
           <a:xfrm>
-            <a:off x="2190314" y="191691"/>
-            <a:ext cx="659963" cy="3051215"/>
+            <a:off x="4580572" y="191691"/>
+            <a:ext cx="1380173" cy="3051215"/>
           </a:xfrm>
         </p:spPr>
         <p:txBody>
@@ -542,8 +543,8 @@
         </p:nvSpPr>
         <p:spPr>
           <a:xfrm>
-            <a:off x="210423" y="191691"/>
-            <a:ext cx="1941632" cy="3051215"/>
+            <a:off x="440055" y="191691"/>
+            <a:ext cx="4060508" cy="3051215"/>
           </a:xfrm>
         </p:spPr>
         <p:txBody>
@@ -604,7 +605,7 @@
           <a:p>
             <a:fld id="{095AB915-DB53-41BD-A85E-FD7AC785D22D}" type="datetimeFigureOut">
               <a:rPr lang="LID4096" smtClean="0"/>
-              <a:t>02/28/2025</a:t>
+              <a:t>04/24/2026</a:t>
             </a:fld>
             <a:endParaRPr lang="LID4096"/>
           </a:p>
@@ -655,7 +656,7 @@
     </p:spTree>
     <p:extLst>
       <p:ext uri="{BB962C8B-B14F-4D97-AF65-F5344CB8AC3E}">
-        <p14:creationId xmlns:p14="http://schemas.microsoft.com/office/powerpoint/2010/main" val="391618268"/>
+        <p14:creationId xmlns:p14="http://schemas.microsoft.com/office/powerpoint/2010/main" val="762585636"/>
       </p:ext>
     </p:extLst>
   </p:cSld>
@@ -774,7 +775,7 @@
           <a:p>
             <a:fld id="{095AB915-DB53-41BD-A85E-FD7AC785D22D}" type="datetimeFigureOut">
               <a:rPr lang="LID4096" smtClean="0"/>
-              <a:t>02/28/2025</a:t>
+              <a:t>04/24/2026</a:t>
             </a:fld>
             <a:endParaRPr lang="LID4096"/>
           </a:p>
@@ -825,7 +826,7 @@
     </p:spTree>
     <p:extLst>
       <p:ext uri="{BB962C8B-B14F-4D97-AF65-F5344CB8AC3E}">
-        <p14:creationId xmlns:p14="http://schemas.microsoft.com/office/powerpoint/2010/main" val="4284861157"/>
+        <p14:creationId xmlns:p14="http://schemas.microsoft.com/office/powerpoint/2010/main" val="1162719382"/>
       </p:ext>
     </p:extLst>
   </p:cSld>
@@ -864,15 +865,15 @@
         </p:nvSpPr>
         <p:spPr>
           <a:xfrm>
-            <a:off x="208829" y="897613"/>
-            <a:ext cx="2639854" cy="1497687"/>
+            <a:off x="436721" y="897613"/>
+            <a:ext cx="5520690" cy="1497687"/>
           </a:xfrm>
         </p:spPr>
         <p:txBody>
           <a:bodyPr anchor="b"/>
           <a:lstStyle>
             <a:lvl1pPr>
-              <a:defRPr sz="2008"/>
+              <a:defRPr sz="3150"/>
             </a:lvl1pPr>
           </a:lstStyle>
           <a:p>
@@ -896,8 +897,8 @@
         </p:nvSpPr>
         <p:spPr>
           <a:xfrm>
-            <a:off x="208829" y="2409469"/>
-            <a:ext cx="2639854" cy="787598"/>
+            <a:off x="436721" y="2409468"/>
+            <a:ext cx="5520690" cy="787598"/>
           </a:xfrm>
         </p:spPr>
         <p:txBody>
@@ -905,7 +906,7 @@
           <a:lstStyle>
             <a:lvl1pPr marL="0" indent="0">
               <a:buNone/>
-              <a:defRPr sz="803">
+              <a:defRPr sz="1260">
                 <a:solidFill>
                   <a:schemeClr val="tx1">
                     <a:tint val="82000"/>
@@ -913,9 +914,9 @@
                 </a:solidFill>
               </a:defRPr>
             </a:lvl1pPr>
-            <a:lvl2pPr marL="153025" indent="0">
+            <a:lvl2pPr marL="240030" indent="0">
               <a:buNone/>
-              <a:defRPr sz="669">
+              <a:defRPr sz="1050">
                 <a:solidFill>
                   <a:schemeClr val="tx1">
                     <a:tint val="82000"/>
@@ -923,9 +924,9 @@
                 </a:solidFill>
               </a:defRPr>
             </a:lvl2pPr>
-            <a:lvl3pPr marL="306050" indent="0">
+            <a:lvl3pPr marL="480060" indent="0">
               <a:buNone/>
-              <a:defRPr sz="602">
+              <a:defRPr sz="945">
                 <a:solidFill>
                   <a:schemeClr val="tx1">
                     <a:tint val="82000"/>
@@ -933,9 +934,9 @@
                 </a:solidFill>
               </a:defRPr>
             </a:lvl3pPr>
-            <a:lvl4pPr marL="459075" indent="0">
+            <a:lvl4pPr marL="720090" indent="0">
               <a:buNone/>
-              <a:defRPr sz="536">
+              <a:defRPr sz="840">
                 <a:solidFill>
                   <a:schemeClr val="tx1">
                     <a:tint val="82000"/>
@@ -943,9 +944,9 @@
                 </a:solidFill>
               </a:defRPr>
             </a:lvl4pPr>
-            <a:lvl5pPr marL="612099" indent="0">
+            <a:lvl5pPr marL="960120" indent="0">
               <a:buNone/>
-              <a:defRPr sz="536">
+              <a:defRPr sz="840">
                 <a:solidFill>
                   <a:schemeClr val="tx1">
                     <a:tint val="82000"/>
@@ -953,9 +954,9 @@
                 </a:solidFill>
               </a:defRPr>
             </a:lvl5pPr>
-            <a:lvl6pPr marL="765124" indent="0">
+            <a:lvl6pPr marL="1200150" indent="0">
               <a:buNone/>
-              <a:defRPr sz="536">
+              <a:defRPr sz="840">
                 <a:solidFill>
                   <a:schemeClr val="tx1">
                     <a:tint val="82000"/>
@@ -963,9 +964,9 @@
                 </a:solidFill>
               </a:defRPr>
             </a:lvl6pPr>
-            <a:lvl7pPr marL="918149" indent="0">
+            <a:lvl7pPr marL="1440180" indent="0">
               <a:buNone/>
-              <a:defRPr sz="536">
+              <a:defRPr sz="840">
                 <a:solidFill>
                   <a:schemeClr val="tx1">
                     <a:tint val="82000"/>
@@ -973,9 +974,9 @@
                 </a:solidFill>
               </a:defRPr>
             </a:lvl7pPr>
-            <a:lvl8pPr marL="1071174" indent="0">
+            <a:lvl8pPr marL="1680210" indent="0">
               <a:buNone/>
-              <a:defRPr sz="536">
+              <a:defRPr sz="840">
                 <a:solidFill>
                   <a:schemeClr val="tx1">
                     <a:tint val="82000"/>
@@ -983,9 +984,9 @@
                 </a:solidFill>
               </a:defRPr>
             </a:lvl8pPr>
-            <a:lvl9pPr marL="1224199" indent="0">
+            <a:lvl9pPr marL="1920240" indent="0">
               <a:buNone/>
-              <a:defRPr sz="536">
+              <a:defRPr sz="840">
                 <a:solidFill>
                   <a:schemeClr val="tx1">
                     <a:tint val="82000"/>
@@ -1020,7 +1021,7 @@
           <a:p>
             <a:fld id="{095AB915-DB53-41BD-A85E-FD7AC785D22D}" type="datetimeFigureOut">
               <a:rPr lang="LID4096" smtClean="0"/>
-              <a:t>02/28/2025</a:t>
+              <a:t>04/24/2026</a:t>
             </a:fld>
             <a:endParaRPr lang="LID4096"/>
           </a:p>
@@ -1071,7 +1072,7 @@
     </p:spTree>
     <p:extLst>
       <p:ext uri="{BB962C8B-B14F-4D97-AF65-F5344CB8AC3E}">
-        <p14:creationId xmlns:p14="http://schemas.microsoft.com/office/powerpoint/2010/main" val="2174167073"/>
+        <p14:creationId xmlns:p14="http://schemas.microsoft.com/office/powerpoint/2010/main" val="971069031"/>
       </p:ext>
     </p:extLst>
   </p:cSld>
@@ -1133,8 +1134,8 @@
         </p:nvSpPr>
         <p:spPr>
           <a:xfrm>
-            <a:off x="210423" y="958453"/>
-            <a:ext cx="1300798" cy="2284452"/>
+            <a:off x="440055" y="958453"/>
+            <a:ext cx="2720340" cy="2284452"/>
           </a:xfrm>
         </p:spPr>
         <p:txBody>
@@ -1190,8 +1191,8 @@
         </p:nvSpPr>
         <p:spPr>
           <a:xfrm>
-            <a:off x="1549479" y="958453"/>
-            <a:ext cx="1300798" cy="2284452"/>
+            <a:off x="3240405" y="958453"/>
+            <a:ext cx="2720340" cy="2284452"/>
           </a:xfrm>
         </p:spPr>
         <p:txBody>
@@ -1252,7 +1253,7 @@
           <a:p>
             <a:fld id="{095AB915-DB53-41BD-A85E-FD7AC785D22D}" type="datetimeFigureOut">
               <a:rPr lang="LID4096" smtClean="0"/>
-              <a:t>02/28/2025</a:t>
+              <a:t>04/24/2026</a:t>
             </a:fld>
             <a:endParaRPr lang="LID4096"/>
           </a:p>
@@ -1303,7 +1304,7 @@
     </p:spTree>
     <p:extLst>
       <p:ext uri="{BB962C8B-B14F-4D97-AF65-F5344CB8AC3E}">
-        <p14:creationId xmlns:p14="http://schemas.microsoft.com/office/powerpoint/2010/main" val="1146309910"/>
+        <p14:creationId xmlns:p14="http://schemas.microsoft.com/office/powerpoint/2010/main" val="3721735843"/>
       </p:ext>
     </p:extLst>
   </p:cSld>
@@ -1342,8 +1343,8 @@
         </p:nvSpPr>
         <p:spPr>
           <a:xfrm>
-            <a:off x="210822" y="191691"/>
-            <a:ext cx="2639854" cy="695921"/>
+            <a:off x="440889" y="191691"/>
+            <a:ext cx="5520690" cy="695921"/>
           </a:xfrm>
         </p:spPr>
         <p:txBody>
@@ -1370,8 +1371,8 @@
         </p:nvSpPr>
         <p:spPr>
           <a:xfrm>
-            <a:off x="210822" y="882610"/>
-            <a:ext cx="1294819" cy="432554"/>
+            <a:off x="440889" y="882610"/>
+            <a:ext cx="2707838" cy="432554"/>
           </a:xfrm>
         </p:spPr>
         <p:txBody>
@@ -1379,39 +1380,39 @@
           <a:lstStyle>
             <a:lvl1pPr marL="0" indent="0">
               <a:buNone/>
-              <a:defRPr sz="803" b="1"/>
+              <a:defRPr sz="1260" b="1"/>
             </a:lvl1pPr>
-            <a:lvl2pPr marL="153025" indent="0">
+            <a:lvl2pPr marL="240030" indent="0">
               <a:buNone/>
-              <a:defRPr sz="669" b="1"/>
+              <a:defRPr sz="1050" b="1"/>
             </a:lvl2pPr>
-            <a:lvl3pPr marL="306050" indent="0">
+            <a:lvl3pPr marL="480060" indent="0">
               <a:buNone/>
-              <a:defRPr sz="602" b="1"/>
+              <a:defRPr sz="945" b="1"/>
             </a:lvl3pPr>
-            <a:lvl4pPr marL="459075" indent="0">
+            <a:lvl4pPr marL="720090" indent="0">
               <a:buNone/>
-              <a:defRPr sz="536" b="1"/>
+              <a:defRPr sz="840" b="1"/>
             </a:lvl4pPr>
-            <a:lvl5pPr marL="612099" indent="0">
+            <a:lvl5pPr marL="960120" indent="0">
               <a:buNone/>
-              <a:defRPr sz="536" b="1"/>
+              <a:defRPr sz="840" b="1"/>
             </a:lvl5pPr>
-            <a:lvl6pPr marL="765124" indent="0">
+            <a:lvl6pPr marL="1200150" indent="0">
               <a:buNone/>
-              <a:defRPr sz="536" b="1"/>
+              <a:defRPr sz="840" b="1"/>
             </a:lvl6pPr>
-            <a:lvl7pPr marL="918149" indent="0">
+            <a:lvl7pPr marL="1440180" indent="0">
               <a:buNone/>
-              <a:defRPr sz="536" b="1"/>
+              <a:defRPr sz="840" b="1"/>
             </a:lvl7pPr>
-            <a:lvl8pPr marL="1071174" indent="0">
+            <a:lvl8pPr marL="1680210" indent="0">
               <a:buNone/>
-              <a:defRPr sz="536" b="1"/>
+              <a:defRPr sz="840" b="1"/>
             </a:lvl8pPr>
-            <a:lvl9pPr marL="1224199" indent="0">
+            <a:lvl9pPr marL="1920240" indent="0">
               <a:buNone/>
-              <a:defRPr sz="536" b="1"/>
+              <a:defRPr sz="840" b="1"/>
             </a:lvl9pPr>
           </a:lstStyle>
           <a:p>
@@ -1435,8 +1436,8 @@
         </p:nvSpPr>
         <p:spPr>
           <a:xfrm>
-            <a:off x="210822" y="1315164"/>
-            <a:ext cx="1294819" cy="1934409"/>
+            <a:off x="440889" y="1315164"/>
+            <a:ext cx="2707838" cy="1934409"/>
           </a:xfrm>
         </p:spPr>
         <p:txBody>
@@ -1492,8 +1493,8 @@
         </p:nvSpPr>
         <p:spPr>
           <a:xfrm>
-            <a:off x="1549480" y="882610"/>
-            <a:ext cx="1301196" cy="432554"/>
+            <a:off x="3240405" y="882610"/>
+            <a:ext cx="2721174" cy="432554"/>
           </a:xfrm>
         </p:spPr>
         <p:txBody>
@@ -1501,39 +1502,39 @@
           <a:lstStyle>
             <a:lvl1pPr marL="0" indent="0">
               <a:buNone/>
-              <a:defRPr sz="803" b="1"/>
+              <a:defRPr sz="1260" b="1"/>
             </a:lvl1pPr>
-            <a:lvl2pPr marL="153025" indent="0">
+            <a:lvl2pPr marL="240030" indent="0">
               <a:buNone/>
-              <a:defRPr sz="669" b="1"/>
+              <a:defRPr sz="1050" b="1"/>
             </a:lvl2pPr>
-            <a:lvl3pPr marL="306050" indent="0">
+            <a:lvl3pPr marL="480060" indent="0">
               <a:buNone/>
-              <a:defRPr sz="602" b="1"/>
+              <a:defRPr sz="945" b="1"/>
             </a:lvl3pPr>
-            <a:lvl4pPr marL="459075" indent="0">
+            <a:lvl4pPr marL="720090" indent="0">
               <a:buNone/>
-              <a:defRPr sz="536" b="1"/>
+              <a:defRPr sz="840" b="1"/>
             </a:lvl4pPr>
-            <a:lvl5pPr marL="612099" indent="0">
+            <a:lvl5pPr marL="960120" indent="0">
               <a:buNone/>
-              <a:defRPr sz="536" b="1"/>
+              <a:defRPr sz="840" b="1"/>
             </a:lvl5pPr>
-            <a:lvl6pPr marL="765124" indent="0">
+            <a:lvl6pPr marL="1200150" indent="0">
               <a:buNone/>
-              <a:defRPr sz="536" b="1"/>
+              <a:defRPr sz="840" b="1"/>
             </a:lvl6pPr>
-            <a:lvl7pPr marL="918149" indent="0">
+            <a:lvl7pPr marL="1440180" indent="0">
               <a:buNone/>
-              <a:defRPr sz="536" b="1"/>
+              <a:defRPr sz="840" b="1"/>
             </a:lvl7pPr>
-            <a:lvl8pPr marL="1071174" indent="0">
+            <a:lvl8pPr marL="1680210" indent="0">
               <a:buNone/>
-              <a:defRPr sz="536" b="1"/>
+              <a:defRPr sz="840" b="1"/>
             </a:lvl8pPr>
-            <a:lvl9pPr marL="1224199" indent="0">
+            <a:lvl9pPr marL="1920240" indent="0">
               <a:buNone/>
-              <a:defRPr sz="536" b="1"/>
+              <a:defRPr sz="840" b="1"/>
             </a:lvl9pPr>
           </a:lstStyle>
           <a:p>
@@ -1557,8 +1558,8 @@
         </p:nvSpPr>
         <p:spPr>
           <a:xfrm>
-            <a:off x="1549480" y="1315164"/>
-            <a:ext cx="1301196" cy="1934409"/>
+            <a:off x="3240405" y="1315164"/>
+            <a:ext cx="2721174" cy="1934409"/>
           </a:xfrm>
         </p:spPr>
         <p:txBody>
@@ -1619,7 +1620,7 @@
           <a:p>
             <a:fld id="{095AB915-DB53-41BD-A85E-FD7AC785D22D}" type="datetimeFigureOut">
               <a:rPr lang="LID4096" smtClean="0"/>
-              <a:t>02/28/2025</a:t>
+              <a:t>04/24/2026</a:t>
             </a:fld>
             <a:endParaRPr lang="LID4096"/>
           </a:p>
@@ -1670,7 +1671,7 @@
     </p:spTree>
     <p:extLst>
       <p:ext uri="{BB962C8B-B14F-4D97-AF65-F5344CB8AC3E}">
-        <p14:creationId xmlns:p14="http://schemas.microsoft.com/office/powerpoint/2010/main" val="3041934367"/>
+        <p14:creationId xmlns:p14="http://schemas.microsoft.com/office/powerpoint/2010/main" val="4175374151"/>
       </p:ext>
     </p:extLst>
   </p:cSld>
@@ -1737,7 +1738,7 @@
           <a:p>
             <a:fld id="{095AB915-DB53-41BD-A85E-FD7AC785D22D}" type="datetimeFigureOut">
               <a:rPr lang="LID4096" smtClean="0"/>
-              <a:t>02/28/2025</a:t>
+              <a:t>04/24/2026</a:t>
             </a:fld>
             <a:endParaRPr lang="LID4096"/>
           </a:p>
@@ -1788,7 +1789,7 @@
     </p:spTree>
     <p:extLst>
       <p:ext uri="{BB962C8B-B14F-4D97-AF65-F5344CB8AC3E}">
-        <p14:creationId xmlns:p14="http://schemas.microsoft.com/office/powerpoint/2010/main" val="1852260567"/>
+        <p14:creationId xmlns:p14="http://schemas.microsoft.com/office/powerpoint/2010/main" val="845386653"/>
       </p:ext>
     </p:extLst>
   </p:cSld>
@@ -1832,7 +1833,7 @@
           <a:p>
             <a:fld id="{095AB915-DB53-41BD-A85E-FD7AC785D22D}" type="datetimeFigureOut">
               <a:rPr lang="LID4096" smtClean="0"/>
-              <a:t>02/28/2025</a:t>
+              <a:t>04/24/2026</a:t>
             </a:fld>
             <a:endParaRPr lang="LID4096"/>
           </a:p>
@@ -1883,7 +1884,7 @@
     </p:spTree>
     <p:extLst>
       <p:ext uri="{BB962C8B-B14F-4D97-AF65-F5344CB8AC3E}">
-        <p14:creationId xmlns:p14="http://schemas.microsoft.com/office/powerpoint/2010/main" val="7525957"/>
+        <p14:creationId xmlns:p14="http://schemas.microsoft.com/office/powerpoint/2010/main" val="436589321"/>
       </p:ext>
     </p:extLst>
   </p:cSld>
@@ -1922,15 +1923,15 @@
         </p:nvSpPr>
         <p:spPr>
           <a:xfrm>
-            <a:off x="210822" y="240030"/>
-            <a:ext cx="987155" cy="840105"/>
+            <a:off x="440889" y="240030"/>
+            <a:ext cx="2064424" cy="840105"/>
           </a:xfrm>
         </p:spPr>
         <p:txBody>
           <a:bodyPr anchor="b"/>
           <a:lstStyle>
             <a:lvl1pPr>
-              <a:defRPr sz="1071"/>
+              <a:defRPr sz="1680"/>
             </a:lvl1pPr>
           </a:lstStyle>
           <a:p>
@@ -1954,39 +1955,39 @@
         </p:nvSpPr>
         <p:spPr>
           <a:xfrm>
-            <a:off x="1301196" y="518399"/>
-            <a:ext cx="1549479" cy="2558653"/>
+            <a:off x="2721174" y="518398"/>
+            <a:ext cx="3240405" cy="2558653"/>
           </a:xfrm>
         </p:spPr>
         <p:txBody>
           <a:bodyPr/>
           <a:lstStyle>
             <a:lvl1pPr>
-              <a:defRPr sz="1071"/>
+              <a:defRPr sz="1680"/>
             </a:lvl1pPr>
             <a:lvl2pPr>
-              <a:defRPr sz="937"/>
+              <a:defRPr sz="1470"/>
             </a:lvl2pPr>
             <a:lvl3pPr>
-              <a:defRPr sz="803"/>
+              <a:defRPr sz="1260"/>
             </a:lvl3pPr>
             <a:lvl4pPr>
-              <a:defRPr sz="669"/>
+              <a:defRPr sz="1050"/>
             </a:lvl4pPr>
             <a:lvl5pPr>
-              <a:defRPr sz="669"/>
+              <a:defRPr sz="1050"/>
             </a:lvl5pPr>
             <a:lvl6pPr>
-              <a:defRPr sz="669"/>
+              <a:defRPr sz="1050"/>
             </a:lvl6pPr>
             <a:lvl7pPr>
-              <a:defRPr sz="669"/>
+              <a:defRPr sz="1050"/>
             </a:lvl7pPr>
             <a:lvl8pPr>
-              <a:defRPr sz="669"/>
+              <a:defRPr sz="1050"/>
             </a:lvl8pPr>
             <a:lvl9pPr>
-              <a:defRPr sz="669"/>
+              <a:defRPr sz="1050"/>
             </a:lvl9pPr>
           </a:lstStyle>
           <a:p>
@@ -2039,8 +2040,8 @@
         </p:nvSpPr>
         <p:spPr>
           <a:xfrm>
-            <a:off x="210822" y="1080135"/>
-            <a:ext cx="987155" cy="2001084"/>
+            <a:off x="440889" y="1080135"/>
+            <a:ext cx="2064424" cy="2001084"/>
           </a:xfrm>
         </p:spPr>
         <p:txBody>
@@ -2048,39 +2049,39 @@
           <a:lstStyle>
             <a:lvl1pPr marL="0" indent="0">
               <a:buNone/>
-              <a:defRPr sz="536"/>
+              <a:defRPr sz="840"/>
             </a:lvl1pPr>
-            <a:lvl2pPr marL="153025" indent="0">
+            <a:lvl2pPr marL="240030" indent="0">
               <a:buNone/>
-              <a:defRPr sz="469"/>
+              <a:defRPr sz="735"/>
             </a:lvl2pPr>
-            <a:lvl3pPr marL="306050" indent="0">
+            <a:lvl3pPr marL="480060" indent="0">
               <a:buNone/>
-              <a:defRPr sz="402"/>
+              <a:defRPr sz="630"/>
             </a:lvl3pPr>
-            <a:lvl4pPr marL="459075" indent="0">
+            <a:lvl4pPr marL="720090" indent="0">
               <a:buNone/>
-              <a:defRPr sz="335"/>
+              <a:defRPr sz="525"/>
             </a:lvl4pPr>
-            <a:lvl5pPr marL="612099" indent="0">
+            <a:lvl5pPr marL="960120" indent="0">
               <a:buNone/>
-              <a:defRPr sz="335"/>
+              <a:defRPr sz="525"/>
             </a:lvl5pPr>
-            <a:lvl6pPr marL="765124" indent="0">
+            <a:lvl6pPr marL="1200150" indent="0">
               <a:buNone/>
-              <a:defRPr sz="335"/>
+              <a:defRPr sz="525"/>
             </a:lvl6pPr>
-            <a:lvl7pPr marL="918149" indent="0">
+            <a:lvl7pPr marL="1440180" indent="0">
               <a:buNone/>
-              <a:defRPr sz="335"/>
+              <a:defRPr sz="525"/>
             </a:lvl7pPr>
-            <a:lvl8pPr marL="1071174" indent="0">
+            <a:lvl8pPr marL="1680210" indent="0">
               <a:buNone/>
-              <a:defRPr sz="335"/>
+              <a:defRPr sz="525"/>
             </a:lvl8pPr>
-            <a:lvl9pPr marL="1224199" indent="0">
+            <a:lvl9pPr marL="1920240" indent="0">
               <a:buNone/>
-              <a:defRPr sz="335"/>
+              <a:defRPr sz="525"/>
             </a:lvl9pPr>
           </a:lstStyle>
           <a:p>
@@ -2109,7 +2110,7 @@
           <a:p>
             <a:fld id="{095AB915-DB53-41BD-A85E-FD7AC785D22D}" type="datetimeFigureOut">
               <a:rPr lang="LID4096" smtClean="0"/>
-              <a:t>02/28/2025</a:t>
+              <a:t>04/24/2026</a:t>
             </a:fld>
             <a:endParaRPr lang="LID4096"/>
           </a:p>
@@ -2160,7 +2161,7 @@
     </p:spTree>
     <p:extLst>
       <p:ext uri="{BB962C8B-B14F-4D97-AF65-F5344CB8AC3E}">
-        <p14:creationId xmlns:p14="http://schemas.microsoft.com/office/powerpoint/2010/main" val="3830504101"/>
+        <p14:creationId xmlns:p14="http://schemas.microsoft.com/office/powerpoint/2010/main" val="153754866"/>
       </p:ext>
     </p:extLst>
   </p:cSld>
@@ -2199,15 +2200,15 @@
         </p:nvSpPr>
         <p:spPr>
           <a:xfrm>
-            <a:off x="210822" y="240030"/>
-            <a:ext cx="987155" cy="840105"/>
+            <a:off x="440889" y="240030"/>
+            <a:ext cx="2064424" cy="840105"/>
           </a:xfrm>
         </p:spPr>
         <p:txBody>
           <a:bodyPr anchor="b"/>
           <a:lstStyle>
             <a:lvl1pPr>
-              <a:defRPr sz="1071"/>
+              <a:defRPr sz="1680"/>
             </a:lvl1pPr>
           </a:lstStyle>
           <a:p>
@@ -2231,8 +2232,8 @@
         </p:nvSpPr>
         <p:spPr>
           <a:xfrm>
-            <a:off x="1301196" y="518399"/>
-            <a:ext cx="1549479" cy="2558653"/>
+            <a:off x="2721174" y="518398"/>
+            <a:ext cx="3240405" cy="2558653"/>
           </a:xfrm>
         </p:spPr>
         <p:txBody>
@@ -2240,39 +2241,39 @@
           <a:lstStyle>
             <a:lvl1pPr marL="0" indent="0">
               <a:buNone/>
-              <a:defRPr sz="1071"/>
+              <a:defRPr sz="1680"/>
             </a:lvl1pPr>
-            <a:lvl2pPr marL="153025" indent="0">
+            <a:lvl2pPr marL="240030" indent="0">
               <a:buNone/>
-              <a:defRPr sz="937"/>
+              <a:defRPr sz="1470"/>
             </a:lvl2pPr>
-            <a:lvl3pPr marL="306050" indent="0">
+            <a:lvl3pPr marL="480060" indent="0">
               <a:buNone/>
-              <a:defRPr sz="803"/>
+              <a:defRPr sz="1260"/>
             </a:lvl3pPr>
-            <a:lvl4pPr marL="459075" indent="0">
+            <a:lvl4pPr marL="720090" indent="0">
               <a:buNone/>
-              <a:defRPr sz="669"/>
+              <a:defRPr sz="1050"/>
             </a:lvl4pPr>
-            <a:lvl5pPr marL="612099" indent="0">
+            <a:lvl5pPr marL="960120" indent="0">
               <a:buNone/>
-              <a:defRPr sz="669"/>
+              <a:defRPr sz="1050"/>
             </a:lvl5pPr>
-            <a:lvl6pPr marL="765124" indent="0">
+            <a:lvl6pPr marL="1200150" indent="0">
               <a:buNone/>
-              <a:defRPr sz="669"/>
+              <a:defRPr sz="1050"/>
             </a:lvl6pPr>
-            <a:lvl7pPr marL="918149" indent="0">
+            <a:lvl7pPr marL="1440180" indent="0">
               <a:buNone/>
-              <a:defRPr sz="669"/>
+              <a:defRPr sz="1050"/>
             </a:lvl7pPr>
-            <a:lvl8pPr marL="1071174" indent="0">
+            <a:lvl8pPr marL="1680210" indent="0">
               <a:buNone/>
-              <a:defRPr sz="669"/>
+              <a:defRPr sz="1050"/>
             </a:lvl8pPr>
-            <a:lvl9pPr marL="1224199" indent="0">
+            <a:lvl9pPr marL="1920240" indent="0">
               <a:buNone/>
-              <a:defRPr sz="669"/>
+              <a:defRPr sz="1050"/>
             </a:lvl9pPr>
           </a:lstStyle>
           <a:p>
@@ -2296,8 +2297,8 @@
         </p:nvSpPr>
         <p:spPr>
           <a:xfrm>
-            <a:off x="210822" y="1080135"/>
-            <a:ext cx="987155" cy="2001084"/>
+            <a:off x="440889" y="1080135"/>
+            <a:ext cx="2064424" cy="2001084"/>
           </a:xfrm>
         </p:spPr>
         <p:txBody>
@@ -2305,39 +2306,39 @@
           <a:lstStyle>
             <a:lvl1pPr marL="0" indent="0">
               <a:buNone/>
-              <a:defRPr sz="536"/>
+              <a:defRPr sz="840"/>
             </a:lvl1pPr>
-            <a:lvl2pPr marL="153025" indent="0">
+            <a:lvl2pPr marL="240030" indent="0">
               <a:buNone/>
-              <a:defRPr sz="469"/>
+              <a:defRPr sz="735"/>
             </a:lvl2pPr>
-            <a:lvl3pPr marL="306050" indent="0">
+            <a:lvl3pPr marL="480060" indent="0">
               <a:buNone/>
-              <a:defRPr sz="402"/>
+              <a:defRPr sz="630"/>
             </a:lvl3pPr>
-            <a:lvl4pPr marL="459075" indent="0">
+            <a:lvl4pPr marL="720090" indent="0">
               <a:buNone/>
-              <a:defRPr sz="335"/>
+              <a:defRPr sz="525"/>
             </a:lvl4pPr>
-            <a:lvl5pPr marL="612099" indent="0">
+            <a:lvl5pPr marL="960120" indent="0">
               <a:buNone/>
-              <a:defRPr sz="335"/>
+              <a:defRPr sz="525"/>
             </a:lvl5pPr>
-            <a:lvl6pPr marL="765124" indent="0">
+            <a:lvl6pPr marL="1200150" indent="0">
               <a:buNone/>
-              <a:defRPr sz="335"/>
+              <a:defRPr sz="525"/>
             </a:lvl6pPr>
-            <a:lvl7pPr marL="918149" indent="0">
+            <a:lvl7pPr marL="1440180" indent="0">
               <a:buNone/>
-              <a:defRPr sz="335"/>
+              <a:defRPr sz="525"/>
             </a:lvl7pPr>
-            <a:lvl8pPr marL="1071174" indent="0">
+            <a:lvl8pPr marL="1680210" indent="0">
               <a:buNone/>
-              <a:defRPr sz="335"/>
+              <a:defRPr sz="525"/>
             </a:lvl8pPr>
-            <a:lvl9pPr marL="1224199" indent="0">
+            <a:lvl9pPr marL="1920240" indent="0">
               <a:buNone/>
-              <a:defRPr sz="335"/>
+              <a:defRPr sz="525"/>
             </a:lvl9pPr>
           </a:lstStyle>
           <a:p>
@@ -2366,7 +2367,7 @@
           <a:p>
             <a:fld id="{095AB915-DB53-41BD-A85E-FD7AC785D22D}" type="datetimeFigureOut">
               <a:rPr lang="LID4096" smtClean="0"/>
-              <a:t>02/28/2025</a:t>
+              <a:t>04/24/2026</a:t>
             </a:fld>
             <a:endParaRPr lang="LID4096"/>
           </a:p>
@@ -2417,7 +2418,7 @@
     </p:spTree>
     <p:extLst>
       <p:ext uri="{BB962C8B-B14F-4D97-AF65-F5344CB8AC3E}">
-        <p14:creationId xmlns:p14="http://schemas.microsoft.com/office/powerpoint/2010/main" val="2859716734"/>
+        <p14:creationId xmlns:p14="http://schemas.microsoft.com/office/powerpoint/2010/main" val="3011489025"/>
       </p:ext>
     </p:extLst>
   </p:cSld>
@@ -2461,8 +2462,8 @@
         </p:nvSpPr>
         <p:spPr>
           <a:xfrm>
-            <a:off x="210423" y="191691"/>
-            <a:ext cx="2639854" cy="695921"/>
+            <a:off x="440055" y="191691"/>
+            <a:ext cx="5520690" cy="695921"/>
           </a:xfrm>
           <a:prstGeom prst="rect">
             <a:avLst/>
@@ -2494,8 +2495,8 @@
         </p:nvSpPr>
         <p:spPr>
           <a:xfrm>
-            <a:off x="210423" y="958453"/>
-            <a:ext cx="2639854" cy="2284452"/>
+            <a:off x="440055" y="958453"/>
+            <a:ext cx="5520690" cy="2284452"/>
           </a:xfrm>
           <a:prstGeom prst="rect">
             <a:avLst/>
@@ -2556,8 +2557,8 @@
         </p:nvSpPr>
         <p:spPr>
           <a:xfrm>
-            <a:off x="210423" y="3337084"/>
-            <a:ext cx="688658" cy="191691"/>
+            <a:off x="440055" y="3337084"/>
+            <a:ext cx="1440180" cy="191691"/>
           </a:xfrm>
           <a:prstGeom prst="rect">
             <a:avLst/>
@@ -2567,7 +2568,7 @@
           <a:bodyPr vert="horz" lIns="91440" tIns="45720" rIns="91440" bIns="45720" rtlCol="0" anchor="ctr"/>
           <a:lstStyle>
             <a:lvl1pPr algn="l">
-              <a:defRPr sz="402">
+              <a:defRPr sz="630">
                 <a:solidFill>
                   <a:schemeClr val="tx1">
                     <a:tint val="82000"/>
@@ -2579,7 +2580,7 @@
           <a:p>
             <a:fld id="{095AB915-DB53-41BD-A85E-FD7AC785D22D}" type="datetimeFigureOut">
               <a:rPr lang="LID4096" smtClean="0"/>
-              <a:t>02/28/2025</a:t>
+              <a:t>04/24/2026</a:t>
             </a:fld>
             <a:endParaRPr lang="LID4096"/>
           </a:p>
@@ -2597,8 +2598,8 @@
         </p:nvSpPr>
         <p:spPr>
           <a:xfrm>
-            <a:off x="1013857" y="3337084"/>
-            <a:ext cx="1032986" cy="191691"/>
+            <a:off x="2120265" y="3337084"/>
+            <a:ext cx="2160270" cy="191691"/>
           </a:xfrm>
           <a:prstGeom prst="rect">
             <a:avLst/>
@@ -2608,7 +2609,7 @@
           <a:bodyPr vert="horz" lIns="91440" tIns="45720" rIns="91440" bIns="45720" rtlCol="0" anchor="ctr"/>
           <a:lstStyle>
             <a:lvl1pPr algn="ctr">
-              <a:defRPr sz="402">
+              <a:defRPr sz="630">
                 <a:solidFill>
                   <a:schemeClr val="tx1">
                     <a:tint val="82000"/>
@@ -2634,8 +2635,8 @@
         </p:nvSpPr>
         <p:spPr>
           <a:xfrm>
-            <a:off x="2161619" y="3337084"/>
-            <a:ext cx="688658" cy="191691"/>
+            <a:off x="4520565" y="3337084"/>
+            <a:ext cx="1440180" cy="191691"/>
           </a:xfrm>
           <a:prstGeom prst="rect">
             <a:avLst/>
@@ -2645,7 +2646,7 @@
           <a:bodyPr vert="horz" lIns="91440" tIns="45720" rIns="91440" bIns="45720" rtlCol="0" anchor="ctr"/>
           <a:lstStyle>
             <a:lvl1pPr algn="r">
-              <a:defRPr sz="402">
+              <a:defRPr sz="630">
                 <a:solidFill>
                   <a:schemeClr val="tx1">
                     <a:tint val="82000"/>
@@ -2666,27 +2667,27 @@
     </p:spTree>
     <p:extLst>
       <p:ext uri="{BB962C8B-B14F-4D97-AF65-F5344CB8AC3E}">
-        <p14:creationId xmlns:p14="http://schemas.microsoft.com/office/powerpoint/2010/main" val="576186434"/>
+        <p14:creationId xmlns:p14="http://schemas.microsoft.com/office/powerpoint/2010/main" val="1325950207"/>
       </p:ext>
     </p:extLst>
   </p:cSld>
   <p:clrMap bg1="lt1" tx1="dk1" bg2="lt2" tx2="dk2" accent1="accent1" accent2="accent2" accent3="accent3" accent4="accent4" accent5="accent5" accent6="accent6" hlink="hlink" folHlink="folHlink"/>
   <p:sldLayoutIdLst>
-    <p:sldLayoutId id="2147483673" r:id="rId1"/>
-    <p:sldLayoutId id="2147483674" r:id="rId2"/>
-    <p:sldLayoutId id="2147483675" r:id="rId3"/>
-    <p:sldLayoutId id="2147483676" r:id="rId4"/>
-    <p:sldLayoutId id="2147483677" r:id="rId5"/>
-    <p:sldLayoutId id="2147483678" r:id="rId6"/>
-    <p:sldLayoutId id="2147483679" r:id="rId7"/>
-    <p:sldLayoutId id="2147483680" r:id="rId8"/>
-    <p:sldLayoutId id="2147483681" r:id="rId9"/>
-    <p:sldLayoutId id="2147483682" r:id="rId10"/>
-    <p:sldLayoutId id="2147483683" r:id="rId11"/>
+    <p:sldLayoutId id="2147483697" r:id="rId1"/>
+    <p:sldLayoutId id="2147483698" r:id="rId2"/>
+    <p:sldLayoutId id="2147483699" r:id="rId3"/>
+    <p:sldLayoutId id="2147483700" r:id="rId4"/>
+    <p:sldLayoutId id="2147483701" r:id="rId5"/>
+    <p:sldLayoutId id="2147483702" r:id="rId6"/>
+    <p:sldLayoutId id="2147483703" r:id="rId7"/>
+    <p:sldLayoutId id="2147483704" r:id="rId8"/>
+    <p:sldLayoutId id="2147483705" r:id="rId9"/>
+    <p:sldLayoutId id="2147483706" r:id="rId10"/>
+    <p:sldLayoutId id="2147483707" r:id="rId11"/>
   </p:sldLayoutIdLst>
   <p:txStyles>
     <p:titleStyle>
-      <a:lvl1pPr algn="l" defTabSz="306050" rtl="0" eaLnBrk="1" latinLnBrk="0" hangingPunct="1">
+      <a:lvl1pPr algn="l" defTabSz="480060" rtl="0" eaLnBrk="1" latinLnBrk="0" hangingPunct="1">
         <a:lnSpc>
           <a:spcPct val="90000"/>
         </a:lnSpc>
@@ -2694,7 +2695,7 @@
           <a:spcPct val="0"/>
         </a:spcBef>
         <a:buNone/>
-        <a:defRPr sz="1473" kern="1200">
+        <a:defRPr sz="2310" kern="1200">
           <a:solidFill>
             <a:schemeClr val="tx1"/>
           </a:solidFill>
@@ -2705,16 +2706,16 @@
       </a:lvl1pPr>
     </p:titleStyle>
     <p:bodyStyle>
-      <a:lvl1pPr marL="76512" indent="-76512" algn="l" defTabSz="306050" rtl="0" eaLnBrk="1" latinLnBrk="0" hangingPunct="1">
+      <a:lvl1pPr marL="120015" indent="-120015" algn="l" defTabSz="480060" rtl="0" eaLnBrk="1" latinLnBrk="0" hangingPunct="1">
         <a:lnSpc>
           <a:spcPct val="90000"/>
         </a:lnSpc>
         <a:spcBef>
-          <a:spcPts val="335"/>
+          <a:spcPts val="525"/>
         </a:spcBef>
         <a:buFont typeface="Arial" panose="020B0604020202020204" pitchFamily="34" charset="0"/>
         <a:buChar char="•"/>
-        <a:defRPr sz="937" kern="1200">
+        <a:defRPr sz="1470" kern="1200">
           <a:solidFill>
             <a:schemeClr val="tx1"/>
           </a:solidFill>
@@ -2723,16 +2724,16 @@
           <a:cs typeface="+mn-cs"/>
         </a:defRPr>
       </a:lvl1pPr>
-      <a:lvl2pPr marL="229537" indent="-76512" algn="l" defTabSz="306050" rtl="0" eaLnBrk="1" latinLnBrk="0" hangingPunct="1">
+      <a:lvl2pPr marL="360045" indent="-120015" algn="l" defTabSz="480060" rtl="0" eaLnBrk="1" latinLnBrk="0" hangingPunct="1">
         <a:lnSpc>
           <a:spcPct val="90000"/>
         </a:lnSpc>
         <a:spcBef>
-          <a:spcPts val="167"/>
+          <a:spcPts val="263"/>
         </a:spcBef>
         <a:buFont typeface="Arial" panose="020B0604020202020204" pitchFamily="34" charset="0"/>
         <a:buChar char="•"/>
-        <a:defRPr sz="803" kern="1200">
+        <a:defRPr sz="1260" kern="1200">
           <a:solidFill>
             <a:schemeClr val="tx1"/>
           </a:solidFill>
@@ -2741,16 +2742,16 @@
           <a:cs typeface="+mn-cs"/>
         </a:defRPr>
       </a:lvl2pPr>
-      <a:lvl3pPr marL="382562" indent="-76512" algn="l" defTabSz="306050" rtl="0" eaLnBrk="1" latinLnBrk="0" hangingPunct="1">
+      <a:lvl3pPr marL="600075" indent="-120015" algn="l" defTabSz="480060" rtl="0" eaLnBrk="1" latinLnBrk="0" hangingPunct="1">
         <a:lnSpc>
           <a:spcPct val="90000"/>
         </a:lnSpc>
         <a:spcBef>
-          <a:spcPts val="167"/>
+          <a:spcPts val="263"/>
         </a:spcBef>
         <a:buFont typeface="Arial" panose="020B0604020202020204" pitchFamily="34" charset="0"/>
         <a:buChar char="•"/>
-        <a:defRPr sz="669" kern="1200">
+        <a:defRPr sz="1050" kern="1200">
           <a:solidFill>
             <a:schemeClr val="tx1"/>
           </a:solidFill>
@@ -2759,16 +2760,16 @@
           <a:cs typeface="+mn-cs"/>
         </a:defRPr>
       </a:lvl3pPr>
-      <a:lvl4pPr marL="535587" indent="-76512" algn="l" defTabSz="306050" rtl="0" eaLnBrk="1" latinLnBrk="0" hangingPunct="1">
+      <a:lvl4pPr marL="840105" indent="-120015" algn="l" defTabSz="480060" rtl="0" eaLnBrk="1" latinLnBrk="0" hangingPunct="1">
         <a:lnSpc>
           <a:spcPct val="90000"/>
         </a:lnSpc>
         <a:spcBef>
-          <a:spcPts val="167"/>
+          <a:spcPts val="263"/>
         </a:spcBef>
         <a:buFont typeface="Arial" panose="020B0604020202020204" pitchFamily="34" charset="0"/>
         <a:buChar char="•"/>
-        <a:defRPr sz="602" kern="1200">
+        <a:defRPr sz="945" kern="1200">
           <a:solidFill>
             <a:schemeClr val="tx1"/>
           </a:solidFill>
@@ -2777,16 +2778,16 @@
           <a:cs typeface="+mn-cs"/>
         </a:defRPr>
       </a:lvl4pPr>
-      <a:lvl5pPr marL="688612" indent="-76512" algn="l" defTabSz="306050" rtl="0" eaLnBrk="1" latinLnBrk="0" hangingPunct="1">
+      <a:lvl5pPr marL="1080135" indent="-120015" algn="l" defTabSz="480060" rtl="0" eaLnBrk="1" latinLnBrk="0" hangingPunct="1">
         <a:lnSpc>
           <a:spcPct val="90000"/>
         </a:lnSpc>
         <a:spcBef>
-          <a:spcPts val="167"/>
+          <a:spcPts val="263"/>
         </a:spcBef>
         <a:buFont typeface="Arial" panose="020B0604020202020204" pitchFamily="34" charset="0"/>
         <a:buChar char="•"/>
-        <a:defRPr sz="602" kern="1200">
+        <a:defRPr sz="945" kern="1200">
           <a:solidFill>
             <a:schemeClr val="tx1"/>
           </a:solidFill>
@@ -2795,16 +2796,16 @@
           <a:cs typeface="+mn-cs"/>
         </a:defRPr>
       </a:lvl5pPr>
-      <a:lvl6pPr marL="841637" indent="-76512" algn="l" defTabSz="306050" rtl="0" eaLnBrk="1" latinLnBrk="0" hangingPunct="1">
+      <a:lvl6pPr marL="1320165" indent="-120015" algn="l" defTabSz="480060" rtl="0" eaLnBrk="1" latinLnBrk="0" hangingPunct="1">
         <a:lnSpc>
           <a:spcPct val="90000"/>
         </a:lnSpc>
         <a:spcBef>
-          <a:spcPts val="167"/>
+          <a:spcPts val="263"/>
         </a:spcBef>
         <a:buFont typeface="Arial" panose="020B0604020202020204" pitchFamily="34" charset="0"/>
         <a:buChar char="•"/>
-        <a:defRPr sz="602" kern="1200">
+        <a:defRPr sz="945" kern="1200">
           <a:solidFill>
             <a:schemeClr val="tx1"/>
           </a:solidFill>
@@ -2813,16 +2814,16 @@
           <a:cs typeface="+mn-cs"/>
         </a:defRPr>
       </a:lvl6pPr>
-      <a:lvl7pPr marL="994661" indent="-76512" algn="l" defTabSz="306050" rtl="0" eaLnBrk="1" latinLnBrk="0" hangingPunct="1">
+      <a:lvl7pPr marL="1560195" indent="-120015" algn="l" defTabSz="480060" rtl="0" eaLnBrk="1" latinLnBrk="0" hangingPunct="1">
         <a:lnSpc>
           <a:spcPct val="90000"/>
         </a:lnSpc>
         <a:spcBef>
-          <a:spcPts val="167"/>
+          <a:spcPts val="263"/>
         </a:spcBef>
         <a:buFont typeface="Arial" panose="020B0604020202020204" pitchFamily="34" charset="0"/>
         <a:buChar char="•"/>
-        <a:defRPr sz="602" kern="1200">
+        <a:defRPr sz="945" kern="1200">
           <a:solidFill>
             <a:schemeClr val="tx1"/>
           </a:solidFill>
@@ -2831,16 +2832,16 @@
           <a:cs typeface="+mn-cs"/>
         </a:defRPr>
       </a:lvl7pPr>
-      <a:lvl8pPr marL="1147686" indent="-76512" algn="l" defTabSz="306050" rtl="0" eaLnBrk="1" latinLnBrk="0" hangingPunct="1">
+      <a:lvl8pPr marL="1800225" indent="-120015" algn="l" defTabSz="480060" rtl="0" eaLnBrk="1" latinLnBrk="0" hangingPunct="1">
         <a:lnSpc>
           <a:spcPct val="90000"/>
         </a:lnSpc>
         <a:spcBef>
-          <a:spcPts val="167"/>
+          <a:spcPts val="263"/>
         </a:spcBef>
         <a:buFont typeface="Arial" panose="020B0604020202020204" pitchFamily="34" charset="0"/>
         <a:buChar char="•"/>
-        <a:defRPr sz="602" kern="1200">
+        <a:defRPr sz="945" kern="1200">
           <a:solidFill>
             <a:schemeClr val="tx1"/>
           </a:solidFill>
@@ -2849,16 +2850,16 @@
           <a:cs typeface="+mn-cs"/>
         </a:defRPr>
       </a:lvl8pPr>
-      <a:lvl9pPr marL="1300711" indent="-76512" algn="l" defTabSz="306050" rtl="0" eaLnBrk="1" latinLnBrk="0" hangingPunct="1">
+      <a:lvl9pPr marL="2040255" indent="-120015" algn="l" defTabSz="480060" rtl="0" eaLnBrk="1" latinLnBrk="0" hangingPunct="1">
         <a:lnSpc>
           <a:spcPct val="90000"/>
         </a:lnSpc>
         <a:spcBef>
-          <a:spcPts val="167"/>
+          <a:spcPts val="263"/>
         </a:spcBef>
         <a:buFont typeface="Arial" panose="020B0604020202020204" pitchFamily="34" charset="0"/>
         <a:buChar char="•"/>
-        <a:defRPr sz="602" kern="1200">
+        <a:defRPr sz="945" kern="1200">
           <a:solidFill>
             <a:schemeClr val="tx1"/>
           </a:solidFill>
@@ -2872,8 +2873,8 @@
       <a:defPPr>
         <a:defRPr lang="en-US"/>
       </a:defPPr>
-      <a:lvl1pPr marL="0" algn="l" defTabSz="306050" rtl="0" eaLnBrk="1" latinLnBrk="0" hangingPunct="1">
-        <a:defRPr sz="602" kern="1200">
+      <a:lvl1pPr marL="0" algn="l" defTabSz="480060" rtl="0" eaLnBrk="1" latinLnBrk="0" hangingPunct="1">
+        <a:defRPr sz="945" kern="1200">
           <a:solidFill>
             <a:schemeClr val="tx1"/>
           </a:solidFill>
@@ -2882,8 +2883,8 @@
           <a:cs typeface="+mn-cs"/>
         </a:defRPr>
       </a:lvl1pPr>
-      <a:lvl2pPr marL="153025" algn="l" defTabSz="306050" rtl="0" eaLnBrk="1" latinLnBrk="0" hangingPunct="1">
-        <a:defRPr sz="602" kern="1200">
+      <a:lvl2pPr marL="240030" algn="l" defTabSz="480060" rtl="0" eaLnBrk="1" latinLnBrk="0" hangingPunct="1">
+        <a:defRPr sz="945" kern="1200">
           <a:solidFill>
             <a:schemeClr val="tx1"/>
           </a:solidFill>
@@ -2892,8 +2893,8 @@
           <a:cs typeface="+mn-cs"/>
         </a:defRPr>
       </a:lvl2pPr>
-      <a:lvl3pPr marL="306050" algn="l" defTabSz="306050" rtl="0" eaLnBrk="1" latinLnBrk="0" hangingPunct="1">
-        <a:defRPr sz="602" kern="1200">
+      <a:lvl3pPr marL="480060" algn="l" defTabSz="480060" rtl="0" eaLnBrk="1" latinLnBrk="0" hangingPunct="1">
+        <a:defRPr sz="945" kern="1200">
           <a:solidFill>
             <a:schemeClr val="tx1"/>
           </a:solidFill>
@@ -2902,8 +2903,8 @@
           <a:cs typeface="+mn-cs"/>
         </a:defRPr>
       </a:lvl3pPr>
-      <a:lvl4pPr marL="459075" algn="l" defTabSz="306050" rtl="0" eaLnBrk="1" latinLnBrk="0" hangingPunct="1">
-        <a:defRPr sz="602" kern="1200">
+      <a:lvl4pPr marL="720090" algn="l" defTabSz="480060" rtl="0" eaLnBrk="1" latinLnBrk="0" hangingPunct="1">
+        <a:defRPr sz="945" kern="1200">
           <a:solidFill>
             <a:schemeClr val="tx1"/>
           </a:solidFill>
@@ -2912,8 +2913,8 @@
           <a:cs typeface="+mn-cs"/>
         </a:defRPr>
       </a:lvl4pPr>
-      <a:lvl5pPr marL="612099" algn="l" defTabSz="306050" rtl="0" eaLnBrk="1" latinLnBrk="0" hangingPunct="1">
-        <a:defRPr sz="602" kern="1200">
+      <a:lvl5pPr marL="960120" algn="l" defTabSz="480060" rtl="0" eaLnBrk="1" latinLnBrk="0" hangingPunct="1">
+        <a:defRPr sz="945" kern="1200">
           <a:solidFill>
             <a:schemeClr val="tx1"/>
           </a:solidFill>
@@ -2922,8 +2923,8 @@
           <a:cs typeface="+mn-cs"/>
         </a:defRPr>
       </a:lvl5pPr>
-      <a:lvl6pPr marL="765124" algn="l" defTabSz="306050" rtl="0" eaLnBrk="1" latinLnBrk="0" hangingPunct="1">
-        <a:defRPr sz="602" kern="1200">
+      <a:lvl6pPr marL="1200150" algn="l" defTabSz="480060" rtl="0" eaLnBrk="1" latinLnBrk="0" hangingPunct="1">
+        <a:defRPr sz="945" kern="1200">
           <a:solidFill>
             <a:schemeClr val="tx1"/>
           </a:solidFill>
@@ -2932,8 +2933,8 @@
           <a:cs typeface="+mn-cs"/>
         </a:defRPr>
       </a:lvl6pPr>
-      <a:lvl7pPr marL="918149" algn="l" defTabSz="306050" rtl="0" eaLnBrk="1" latinLnBrk="0" hangingPunct="1">
-        <a:defRPr sz="602" kern="1200">
+      <a:lvl7pPr marL="1440180" algn="l" defTabSz="480060" rtl="0" eaLnBrk="1" latinLnBrk="0" hangingPunct="1">
+        <a:defRPr sz="945" kern="1200">
           <a:solidFill>
             <a:schemeClr val="tx1"/>
           </a:solidFill>
@@ -2942,8 +2943,8 @@
           <a:cs typeface="+mn-cs"/>
         </a:defRPr>
       </a:lvl7pPr>
-      <a:lvl8pPr marL="1071174" algn="l" defTabSz="306050" rtl="0" eaLnBrk="1" latinLnBrk="0" hangingPunct="1">
-        <a:defRPr sz="602" kern="1200">
+      <a:lvl8pPr marL="1680210" algn="l" defTabSz="480060" rtl="0" eaLnBrk="1" latinLnBrk="0" hangingPunct="1">
+        <a:defRPr sz="945" kern="1200">
           <a:solidFill>
             <a:schemeClr val="tx1"/>
           </a:solidFill>
@@ -2952,8 +2953,8 @@
           <a:cs typeface="+mn-cs"/>
         </a:defRPr>
       </a:lvl8pPr>
-      <a:lvl9pPr marL="1224199" algn="l" defTabSz="306050" rtl="0" eaLnBrk="1" latinLnBrk="0" hangingPunct="1">
-        <a:defRPr sz="602" kern="1200">
+      <a:lvl9pPr marL="1920240" algn="l" defTabSz="480060" rtl="0" eaLnBrk="1" latinLnBrk="0" hangingPunct="1">
+        <a:defRPr sz="945" kern="1200">
           <a:solidFill>
             <a:schemeClr val="tx1"/>
           </a:solidFill>
@@ -2986,6 +2987,3625 @@
       </p:grpSpPr>
       <p:sp>
         <p:nvSpPr>
+          <p:cNvPr id="84" name="Rectangle 83">
+            <a:extLst>
+              <a:ext uri="{FF2B5EF4-FFF2-40B4-BE49-F238E27FC236}">
+                <a16:creationId xmlns:a16="http://schemas.microsoft.com/office/drawing/2014/main" id="{2003E9FB-AAC8-849D-E785-D8CD021DB9ED}"/>
+              </a:ext>
+            </a:extLst>
+          </p:cNvPr>
+          <p:cNvSpPr/>
+          <p:nvPr/>
+        </p:nvSpPr>
+        <p:spPr>
+          <a:xfrm>
+            <a:off x="0" y="0"/>
+            <a:ext cx="5680699" cy="3600450"/>
+          </a:xfrm>
+          <a:prstGeom prst="rect">
+            <a:avLst/>
+          </a:prstGeom>
+          <a:solidFill>
+            <a:srgbClr val="FFFFFF"/>
+          </a:solidFill>
+          <a:ln>
+            <a:solidFill>
+              <a:schemeClr val="bg1"/>
+            </a:solidFill>
+          </a:ln>
+        </p:spPr>
+        <p:style>
+          <a:lnRef idx="2">
+            <a:schemeClr val="accent1">
+              <a:shade val="15000"/>
+            </a:schemeClr>
+          </a:lnRef>
+          <a:fillRef idx="1">
+            <a:schemeClr val="accent1"/>
+          </a:fillRef>
+          <a:effectRef idx="0">
+            <a:schemeClr val="accent1"/>
+          </a:effectRef>
+          <a:fontRef idx="minor">
+            <a:schemeClr val="lt1"/>
+          </a:fontRef>
+        </p:style>
+        <p:txBody>
+          <a:bodyPr rtlCol="0" anchor="ctr"/>
+          <a:lstStyle/>
+          <a:p>
+            <a:pPr algn="ctr"/>
+            <a:endParaRPr lang="en-US"/>
+          </a:p>
+        </p:txBody>
+      </p:sp>
+      <p:grpSp>
+        <p:nvGrpSpPr>
+          <p:cNvPr id="4" name="Group 3">
+            <a:extLst>
+              <a:ext uri="{FF2B5EF4-FFF2-40B4-BE49-F238E27FC236}">
+                <a16:creationId xmlns:a16="http://schemas.microsoft.com/office/drawing/2014/main" id="{D961853B-7E51-2F04-7D37-DDFC4A446C6F}"/>
+              </a:ext>
+            </a:extLst>
+          </p:cNvPr>
+          <p:cNvGrpSpPr/>
+          <p:nvPr/>
+        </p:nvGrpSpPr>
+        <p:grpSpPr>
+          <a:xfrm>
+            <a:off x="410508" y="500782"/>
+            <a:ext cx="623653" cy="669179"/>
+            <a:chOff x="94594" y="1868587"/>
+            <a:chExt cx="623653" cy="669179"/>
+          </a:xfrm>
+        </p:grpSpPr>
+        <p:grpSp>
+          <p:nvGrpSpPr>
+            <p:cNvPr id="5" name="Group 4">
+              <a:extLst>
+                <a:ext uri="{FF2B5EF4-FFF2-40B4-BE49-F238E27FC236}">
+                  <a16:creationId xmlns:a16="http://schemas.microsoft.com/office/drawing/2014/main" id="{A7287F21-B16F-2710-664B-1540AB7DE2F9}"/>
+                </a:ext>
+              </a:extLst>
+            </p:cNvPr>
+            <p:cNvGrpSpPr/>
+            <p:nvPr/>
+          </p:nvGrpSpPr>
+          <p:grpSpPr>
+            <a:xfrm>
+              <a:off x="94594" y="1872556"/>
+              <a:ext cx="68712" cy="92593"/>
+              <a:chOff x="1844231" y="869163"/>
+              <a:chExt cx="108640" cy="146399"/>
+            </a:xfrm>
+          </p:grpSpPr>
+          <p:cxnSp>
+            <p:nvCxnSpPr>
+              <p:cNvPr id="38" name="Straight Connector 37">
+                <a:extLst>
+                  <a:ext uri="{FF2B5EF4-FFF2-40B4-BE49-F238E27FC236}">
+                    <a16:creationId xmlns:a16="http://schemas.microsoft.com/office/drawing/2014/main" id="{AA2EFCA2-240C-5D76-F54F-73A8CC495B63}"/>
+                  </a:ext>
+                </a:extLst>
+              </p:cNvPr>
+              <p:cNvCxnSpPr/>
+              <p:nvPr/>
+            </p:nvCxnSpPr>
+            <p:spPr>
+              <a:xfrm>
+                <a:off x="1876425" y="871562"/>
+                <a:ext cx="0" cy="144000"/>
+              </a:xfrm>
+              <a:prstGeom prst="line">
+                <a:avLst/>
+              </a:prstGeom>
+              <a:ln w="15875"/>
+            </p:spPr>
+            <p:style>
+              <a:lnRef idx="1">
+                <a:schemeClr val="accent1"/>
+              </a:lnRef>
+              <a:fillRef idx="0">
+                <a:schemeClr val="accent1"/>
+              </a:fillRef>
+              <a:effectRef idx="0">
+                <a:schemeClr val="accent1"/>
+              </a:effectRef>
+              <a:fontRef idx="minor">
+                <a:schemeClr val="tx1"/>
+              </a:fontRef>
+            </p:style>
+          </p:cxnSp>
+          <p:cxnSp>
+            <p:nvCxnSpPr>
+              <p:cNvPr id="39" name="Straight Connector 38">
+                <a:extLst>
+                  <a:ext uri="{FF2B5EF4-FFF2-40B4-BE49-F238E27FC236}">
+                    <a16:creationId xmlns:a16="http://schemas.microsoft.com/office/drawing/2014/main" id="{F91E93C8-2BE2-A81B-4FF7-F330B2581329}"/>
+                  </a:ext>
+                </a:extLst>
+              </p:cNvPr>
+              <p:cNvCxnSpPr>
+                <a:cxnSpLocks/>
+              </p:cNvCxnSpPr>
+              <p:nvPr/>
+            </p:nvCxnSpPr>
+            <p:spPr>
+              <a:xfrm rot="2700000">
+                <a:off x="1907871" y="872338"/>
+                <a:ext cx="0" cy="90000"/>
+              </a:xfrm>
+              <a:prstGeom prst="line">
+                <a:avLst/>
+              </a:prstGeom>
+              <a:ln w="15875"/>
+            </p:spPr>
+            <p:style>
+              <a:lnRef idx="1">
+                <a:schemeClr val="accent1"/>
+              </a:lnRef>
+              <a:fillRef idx="0">
+                <a:schemeClr val="accent1"/>
+              </a:fillRef>
+              <a:effectRef idx="0">
+                <a:schemeClr val="accent1"/>
+              </a:effectRef>
+              <a:fontRef idx="minor">
+                <a:schemeClr val="tx1"/>
+              </a:fontRef>
+            </p:style>
+          </p:cxnSp>
+          <p:cxnSp>
+            <p:nvCxnSpPr>
+              <p:cNvPr id="40" name="Straight Connector 39">
+                <a:extLst>
+                  <a:ext uri="{FF2B5EF4-FFF2-40B4-BE49-F238E27FC236}">
+                    <a16:creationId xmlns:a16="http://schemas.microsoft.com/office/drawing/2014/main" id="{25BA2A28-3AD1-DB62-6288-2FC198816FDA}"/>
+                  </a:ext>
+                </a:extLst>
+              </p:cNvPr>
+              <p:cNvCxnSpPr>
+                <a:cxnSpLocks/>
+              </p:cNvCxnSpPr>
+              <p:nvPr/>
+            </p:nvCxnSpPr>
+            <p:spPr>
+              <a:xfrm rot="18900000" flipV="1">
+                <a:off x="1844231" y="869163"/>
+                <a:ext cx="0" cy="90000"/>
+              </a:xfrm>
+              <a:prstGeom prst="line">
+                <a:avLst/>
+              </a:prstGeom>
+              <a:ln w="15875"/>
+            </p:spPr>
+            <p:style>
+              <a:lnRef idx="1">
+                <a:schemeClr val="accent1"/>
+              </a:lnRef>
+              <a:fillRef idx="0">
+                <a:schemeClr val="accent1"/>
+              </a:fillRef>
+              <a:effectRef idx="0">
+                <a:schemeClr val="accent1"/>
+              </a:effectRef>
+              <a:fontRef idx="minor">
+                <a:schemeClr val="tx1"/>
+              </a:fontRef>
+            </p:style>
+          </p:cxnSp>
+        </p:grpSp>
+        <p:grpSp>
+          <p:nvGrpSpPr>
+            <p:cNvPr id="6" name="Group 5">
+              <a:extLst>
+                <a:ext uri="{FF2B5EF4-FFF2-40B4-BE49-F238E27FC236}">
+                  <a16:creationId xmlns:a16="http://schemas.microsoft.com/office/drawing/2014/main" id="{A125BF5B-B4D0-3A1A-4B47-ED903FCD7C83}"/>
+                </a:ext>
+              </a:extLst>
+            </p:cNvPr>
+            <p:cNvGrpSpPr/>
+            <p:nvPr/>
+          </p:nvGrpSpPr>
+          <p:grpSpPr>
+            <a:xfrm>
+              <a:off x="98940" y="2152583"/>
+              <a:ext cx="68712" cy="92593"/>
+              <a:chOff x="1844231" y="869163"/>
+              <a:chExt cx="108640" cy="146399"/>
+            </a:xfrm>
+          </p:grpSpPr>
+          <p:cxnSp>
+            <p:nvCxnSpPr>
+              <p:cNvPr id="35" name="Straight Connector 34">
+                <a:extLst>
+                  <a:ext uri="{FF2B5EF4-FFF2-40B4-BE49-F238E27FC236}">
+                    <a16:creationId xmlns:a16="http://schemas.microsoft.com/office/drawing/2014/main" id="{30810BBA-269A-96DF-F55A-FB6477204EF1}"/>
+                  </a:ext>
+                </a:extLst>
+              </p:cNvPr>
+              <p:cNvCxnSpPr/>
+              <p:nvPr/>
+            </p:nvCxnSpPr>
+            <p:spPr>
+              <a:xfrm>
+                <a:off x="1876425" y="871562"/>
+                <a:ext cx="0" cy="144000"/>
+              </a:xfrm>
+              <a:prstGeom prst="line">
+                <a:avLst/>
+              </a:prstGeom>
+              <a:ln w="15875"/>
+            </p:spPr>
+            <p:style>
+              <a:lnRef idx="1">
+                <a:schemeClr val="accent1"/>
+              </a:lnRef>
+              <a:fillRef idx="0">
+                <a:schemeClr val="accent1"/>
+              </a:fillRef>
+              <a:effectRef idx="0">
+                <a:schemeClr val="accent1"/>
+              </a:effectRef>
+              <a:fontRef idx="minor">
+                <a:schemeClr val="tx1"/>
+              </a:fontRef>
+            </p:style>
+          </p:cxnSp>
+          <p:cxnSp>
+            <p:nvCxnSpPr>
+              <p:cNvPr id="36" name="Straight Connector 35">
+                <a:extLst>
+                  <a:ext uri="{FF2B5EF4-FFF2-40B4-BE49-F238E27FC236}">
+                    <a16:creationId xmlns:a16="http://schemas.microsoft.com/office/drawing/2014/main" id="{FCFA3F38-4005-195B-0DD1-CC0B7A2D3534}"/>
+                  </a:ext>
+                </a:extLst>
+              </p:cNvPr>
+              <p:cNvCxnSpPr>
+                <a:cxnSpLocks/>
+              </p:cNvCxnSpPr>
+              <p:nvPr/>
+            </p:nvCxnSpPr>
+            <p:spPr>
+              <a:xfrm rot="2700000">
+                <a:off x="1907871" y="872338"/>
+                <a:ext cx="0" cy="90000"/>
+              </a:xfrm>
+              <a:prstGeom prst="line">
+                <a:avLst/>
+              </a:prstGeom>
+              <a:ln w="15875"/>
+            </p:spPr>
+            <p:style>
+              <a:lnRef idx="1">
+                <a:schemeClr val="accent1"/>
+              </a:lnRef>
+              <a:fillRef idx="0">
+                <a:schemeClr val="accent1"/>
+              </a:fillRef>
+              <a:effectRef idx="0">
+                <a:schemeClr val="accent1"/>
+              </a:effectRef>
+              <a:fontRef idx="minor">
+                <a:schemeClr val="tx1"/>
+              </a:fontRef>
+            </p:style>
+          </p:cxnSp>
+          <p:cxnSp>
+            <p:nvCxnSpPr>
+              <p:cNvPr id="37" name="Straight Connector 36">
+                <a:extLst>
+                  <a:ext uri="{FF2B5EF4-FFF2-40B4-BE49-F238E27FC236}">
+                    <a16:creationId xmlns:a16="http://schemas.microsoft.com/office/drawing/2014/main" id="{D2E2A459-1DF3-7619-657A-178F7DD10C0C}"/>
+                  </a:ext>
+                </a:extLst>
+              </p:cNvPr>
+              <p:cNvCxnSpPr>
+                <a:cxnSpLocks/>
+              </p:cNvCxnSpPr>
+              <p:nvPr/>
+            </p:nvCxnSpPr>
+            <p:spPr>
+              <a:xfrm rot="18900000" flipV="1">
+                <a:off x="1844231" y="869163"/>
+                <a:ext cx="0" cy="90000"/>
+              </a:xfrm>
+              <a:prstGeom prst="line">
+                <a:avLst/>
+              </a:prstGeom>
+              <a:ln w="15875"/>
+            </p:spPr>
+            <p:style>
+              <a:lnRef idx="1">
+                <a:schemeClr val="accent1"/>
+              </a:lnRef>
+              <a:fillRef idx="0">
+                <a:schemeClr val="accent1"/>
+              </a:fillRef>
+              <a:effectRef idx="0">
+                <a:schemeClr val="accent1"/>
+              </a:effectRef>
+              <a:fontRef idx="minor">
+                <a:schemeClr val="tx1"/>
+              </a:fontRef>
+            </p:style>
+          </p:cxnSp>
+        </p:grpSp>
+        <p:grpSp>
+          <p:nvGrpSpPr>
+            <p:cNvPr id="7" name="Group 6">
+              <a:extLst>
+                <a:ext uri="{FF2B5EF4-FFF2-40B4-BE49-F238E27FC236}">
+                  <a16:creationId xmlns:a16="http://schemas.microsoft.com/office/drawing/2014/main" id="{FBECCC2C-4544-7548-308C-007C40C82D71}"/>
+                </a:ext>
+              </a:extLst>
+            </p:cNvPr>
+            <p:cNvGrpSpPr/>
+            <p:nvPr/>
+          </p:nvGrpSpPr>
+          <p:grpSpPr>
+            <a:xfrm>
+              <a:off x="98940" y="2445006"/>
+              <a:ext cx="68712" cy="92593"/>
+              <a:chOff x="1844231" y="869163"/>
+              <a:chExt cx="108640" cy="146399"/>
+            </a:xfrm>
+          </p:grpSpPr>
+          <p:cxnSp>
+            <p:nvCxnSpPr>
+              <p:cNvPr id="32" name="Straight Connector 31">
+                <a:extLst>
+                  <a:ext uri="{FF2B5EF4-FFF2-40B4-BE49-F238E27FC236}">
+                    <a16:creationId xmlns:a16="http://schemas.microsoft.com/office/drawing/2014/main" id="{3735932A-90AD-E071-22B2-D7D7027EB31F}"/>
+                  </a:ext>
+                </a:extLst>
+              </p:cNvPr>
+              <p:cNvCxnSpPr/>
+              <p:nvPr/>
+            </p:nvCxnSpPr>
+            <p:spPr>
+              <a:xfrm>
+                <a:off x="1876425" y="871562"/>
+                <a:ext cx="0" cy="144000"/>
+              </a:xfrm>
+              <a:prstGeom prst="line">
+                <a:avLst/>
+              </a:prstGeom>
+              <a:ln w="15875"/>
+            </p:spPr>
+            <p:style>
+              <a:lnRef idx="1">
+                <a:schemeClr val="accent1"/>
+              </a:lnRef>
+              <a:fillRef idx="0">
+                <a:schemeClr val="accent1"/>
+              </a:fillRef>
+              <a:effectRef idx="0">
+                <a:schemeClr val="accent1"/>
+              </a:effectRef>
+              <a:fontRef idx="minor">
+                <a:schemeClr val="tx1"/>
+              </a:fontRef>
+            </p:style>
+          </p:cxnSp>
+          <p:cxnSp>
+            <p:nvCxnSpPr>
+              <p:cNvPr id="33" name="Straight Connector 32">
+                <a:extLst>
+                  <a:ext uri="{FF2B5EF4-FFF2-40B4-BE49-F238E27FC236}">
+                    <a16:creationId xmlns:a16="http://schemas.microsoft.com/office/drawing/2014/main" id="{8B688449-C1CF-8B5C-8C59-790E6EDF3780}"/>
+                  </a:ext>
+                </a:extLst>
+              </p:cNvPr>
+              <p:cNvCxnSpPr>
+                <a:cxnSpLocks/>
+              </p:cNvCxnSpPr>
+              <p:nvPr/>
+            </p:nvCxnSpPr>
+            <p:spPr>
+              <a:xfrm rot="2700000">
+                <a:off x="1907871" y="872338"/>
+                <a:ext cx="0" cy="90000"/>
+              </a:xfrm>
+              <a:prstGeom prst="line">
+                <a:avLst/>
+              </a:prstGeom>
+              <a:ln w="15875"/>
+            </p:spPr>
+            <p:style>
+              <a:lnRef idx="1">
+                <a:schemeClr val="accent1"/>
+              </a:lnRef>
+              <a:fillRef idx="0">
+                <a:schemeClr val="accent1"/>
+              </a:fillRef>
+              <a:effectRef idx="0">
+                <a:schemeClr val="accent1"/>
+              </a:effectRef>
+              <a:fontRef idx="minor">
+                <a:schemeClr val="tx1"/>
+              </a:fontRef>
+            </p:style>
+          </p:cxnSp>
+          <p:cxnSp>
+            <p:nvCxnSpPr>
+              <p:cNvPr id="34" name="Straight Connector 33">
+                <a:extLst>
+                  <a:ext uri="{FF2B5EF4-FFF2-40B4-BE49-F238E27FC236}">
+                    <a16:creationId xmlns:a16="http://schemas.microsoft.com/office/drawing/2014/main" id="{84BD2960-052F-634E-7864-20952F5C9F0C}"/>
+                  </a:ext>
+                </a:extLst>
+              </p:cNvPr>
+              <p:cNvCxnSpPr>
+                <a:cxnSpLocks/>
+              </p:cNvCxnSpPr>
+              <p:nvPr/>
+            </p:nvCxnSpPr>
+            <p:spPr>
+              <a:xfrm rot="18900000" flipV="1">
+                <a:off x="1844231" y="869163"/>
+                <a:ext cx="0" cy="90000"/>
+              </a:xfrm>
+              <a:prstGeom prst="line">
+                <a:avLst/>
+              </a:prstGeom>
+              <a:ln w="15875"/>
+            </p:spPr>
+            <p:style>
+              <a:lnRef idx="1">
+                <a:schemeClr val="accent1"/>
+              </a:lnRef>
+              <a:fillRef idx="0">
+                <a:schemeClr val="accent1"/>
+              </a:fillRef>
+              <a:effectRef idx="0">
+                <a:schemeClr val="accent1"/>
+              </a:effectRef>
+              <a:fontRef idx="minor">
+                <a:schemeClr val="tx1"/>
+              </a:fontRef>
+            </p:style>
+          </p:cxnSp>
+        </p:grpSp>
+        <p:grpSp>
+          <p:nvGrpSpPr>
+            <p:cNvPr id="8" name="Group 7">
+              <a:extLst>
+                <a:ext uri="{FF2B5EF4-FFF2-40B4-BE49-F238E27FC236}">
+                  <a16:creationId xmlns:a16="http://schemas.microsoft.com/office/drawing/2014/main" id="{89769B79-7950-9CD8-E27D-3A21DAC3C786}"/>
+                </a:ext>
+              </a:extLst>
+            </p:cNvPr>
+            <p:cNvGrpSpPr/>
+            <p:nvPr/>
+          </p:nvGrpSpPr>
+          <p:grpSpPr>
+            <a:xfrm>
+              <a:off x="380901" y="1868587"/>
+              <a:ext cx="68712" cy="92593"/>
+              <a:chOff x="1844231" y="869163"/>
+              <a:chExt cx="108640" cy="146399"/>
+            </a:xfrm>
+          </p:grpSpPr>
+          <p:cxnSp>
+            <p:nvCxnSpPr>
+              <p:cNvPr id="29" name="Straight Connector 28">
+                <a:extLst>
+                  <a:ext uri="{FF2B5EF4-FFF2-40B4-BE49-F238E27FC236}">
+                    <a16:creationId xmlns:a16="http://schemas.microsoft.com/office/drawing/2014/main" id="{C3F63C02-334C-4DAE-4651-E5270FCCD354}"/>
+                  </a:ext>
+                </a:extLst>
+              </p:cNvPr>
+              <p:cNvCxnSpPr/>
+              <p:nvPr/>
+            </p:nvCxnSpPr>
+            <p:spPr>
+              <a:xfrm>
+                <a:off x="1876425" y="871562"/>
+                <a:ext cx="0" cy="144000"/>
+              </a:xfrm>
+              <a:prstGeom prst="line">
+                <a:avLst/>
+              </a:prstGeom>
+              <a:ln w="15875"/>
+            </p:spPr>
+            <p:style>
+              <a:lnRef idx="1">
+                <a:schemeClr val="accent1"/>
+              </a:lnRef>
+              <a:fillRef idx="0">
+                <a:schemeClr val="accent1"/>
+              </a:fillRef>
+              <a:effectRef idx="0">
+                <a:schemeClr val="accent1"/>
+              </a:effectRef>
+              <a:fontRef idx="minor">
+                <a:schemeClr val="tx1"/>
+              </a:fontRef>
+            </p:style>
+          </p:cxnSp>
+          <p:cxnSp>
+            <p:nvCxnSpPr>
+              <p:cNvPr id="30" name="Straight Connector 29">
+                <a:extLst>
+                  <a:ext uri="{FF2B5EF4-FFF2-40B4-BE49-F238E27FC236}">
+                    <a16:creationId xmlns:a16="http://schemas.microsoft.com/office/drawing/2014/main" id="{E337F32D-99BC-5698-4140-318153469D90}"/>
+                  </a:ext>
+                </a:extLst>
+              </p:cNvPr>
+              <p:cNvCxnSpPr>
+                <a:cxnSpLocks/>
+              </p:cNvCxnSpPr>
+              <p:nvPr/>
+            </p:nvCxnSpPr>
+            <p:spPr>
+              <a:xfrm rot="2700000">
+                <a:off x="1907871" y="872338"/>
+                <a:ext cx="0" cy="90000"/>
+              </a:xfrm>
+              <a:prstGeom prst="line">
+                <a:avLst/>
+              </a:prstGeom>
+              <a:ln w="15875"/>
+            </p:spPr>
+            <p:style>
+              <a:lnRef idx="1">
+                <a:schemeClr val="accent1"/>
+              </a:lnRef>
+              <a:fillRef idx="0">
+                <a:schemeClr val="accent1"/>
+              </a:fillRef>
+              <a:effectRef idx="0">
+                <a:schemeClr val="accent1"/>
+              </a:effectRef>
+              <a:fontRef idx="minor">
+                <a:schemeClr val="tx1"/>
+              </a:fontRef>
+            </p:style>
+          </p:cxnSp>
+          <p:cxnSp>
+            <p:nvCxnSpPr>
+              <p:cNvPr id="31" name="Straight Connector 30">
+                <a:extLst>
+                  <a:ext uri="{FF2B5EF4-FFF2-40B4-BE49-F238E27FC236}">
+                    <a16:creationId xmlns:a16="http://schemas.microsoft.com/office/drawing/2014/main" id="{BA111702-BECD-31FE-4158-20CF7D5792E5}"/>
+                  </a:ext>
+                </a:extLst>
+              </p:cNvPr>
+              <p:cNvCxnSpPr>
+                <a:cxnSpLocks/>
+              </p:cNvCxnSpPr>
+              <p:nvPr/>
+            </p:nvCxnSpPr>
+            <p:spPr>
+              <a:xfrm rot="18900000" flipV="1">
+                <a:off x="1844231" y="869163"/>
+                <a:ext cx="0" cy="90000"/>
+              </a:xfrm>
+              <a:prstGeom prst="line">
+                <a:avLst/>
+              </a:prstGeom>
+              <a:ln w="15875"/>
+            </p:spPr>
+            <p:style>
+              <a:lnRef idx="1">
+                <a:schemeClr val="accent1"/>
+              </a:lnRef>
+              <a:fillRef idx="0">
+                <a:schemeClr val="accent1"/>
+              </a:fillRef>
+              <a:effectRef idx="0">
+                <a:schemeClr val="accent1"/>
+              </a:effectRef>
+              <a:fontRef idx="minor">
+                <a:schemeClr val="tx1"/>
+              </a:fontRef>
+            </p:style>
+          </p:cxnSp>
+        </p:grpSp>
+        <p:grpSp>
+          <p:nvGrpSpPr>
+            <p:cNvPr id="9" name="Group 8">
+              <a:extLst>
+                <a:ext uri="{FF2B5EF4-FFF2-40B4-BE49-F238E27FC236}">
+                  <a16:creationId xmlns:a16="http://schemas.microsoft.com/office/drawing/2014/main" id="{A3E70DD8-F433-3CDE-C866-753F18C2C6D0}"/>
+                </a:ext>
+              </a:extLst>
+            </p:cNvPr>
+            <p:cNvGrpSpPr/>
+            <p:nvPr/>
+          </p:nvGrpSpPr>
+          <p:grpSpPr>
+            <a:xfrm>
+              <a:off x="379741" y="2148533"/>
+              <a:ext cx="68712" cy="92593"/>
+              <a:chOff x="1844231" y="869163"/>
+              <a:chExt cx="108640" cy="146399"/>
+            </a:xfrm>
+          </p:grpSpPr>
+          <p:cxnSp>
+            <p:nvCxnSpPr>
+              <p:cNvPr id="26" name="Straight Connector 25">
+                <a:extLst>
+                  <a:ext uri="{FF2B5EF4-FFF2-40B4-BE49-F238E27FC236}">
+                    <a16:creationId xmlns:a16="http://schemas.microsoft.com/office/drawing/2014/main" id="{FB5C7E7B-DE9F-686A-37B4-17D877DC6124}"/>
+                  </a:ext>
+                </a:extLst>
+              </p:cNvPr>
+              <p:cNvCxnSpPr/>
+              <p:nvPr/>
+            </p:nvCxnSpPr>
+            <p:spPr>
+              <a:xfrm>
+                <a:off x="1876425" y="871562"/>
+                <a:ext cx="0" cy="144000"/>
+              </a:xfrm>
+              <a:prstGeom prst="line">
+                <a:avLst/>
+              </a:prstGeom>
+              <a:ln w="15875"/>
+            </p:spPr>
+            <p:style>
+              <a:lnRef idx="1">
+                <a:schemeClr val="accent1"/>
+              </a:lnRef>
+              <a:fillRef idx="0">
+                <a:schemeClr val="accent1"/>
+              </a:fillRef>
+              <a:effectRef idx="0">
+                <a:schemeClr val="accent1"/>
+              </a:effectRef>
+              <a:fontRef idx="minor">
+                <a:schemeClr val="tx1"/>
+              </a:fontRef>
+            </p:style>
+          </p:cxnSp>
+          <p:cxnSp>
+            <p:nvCxnSpPr>
+              <p:cNvPr id="27" name="Straight Connector 26">
+                <a:extLst>
+                  <a:ext uri="{FF2B5EF4-FFF2-40B4-BE49-F238E27FC236}">
+                    <a16:creationId xmlns:a16="http://schemas.microsoft.com/office/drawing/2014/main" id="{82BC855F-16B4-FB24-4EB1-E9655A7AD05C}"/>
+                  </a:ext>
+                </a:extLst>
+              </p:cNvPr>
+              <p:cNvCxnSpPr>
+                <a:cxnSpLocks/>
+              </p:cNvCxnSpPr>
+              <p:nvPr/>
+            </p:nvCxnSpPr>
+            <p:spPr>
+              <a:xfrm rot="2700000">
+                <a:off x="1907871" y="872338"/>
+                <a:ext cx="0" cy="90000"/>
+              </a:xfrm>
+              <a:prstGeom prst="line">
+                <a:avLst/>
+              </a:prstGeom>
+              <a:ln w="15875"/>
+            </p:spPr>
+            <p:style>
+              <a:lnRef idx="1">
+                <a:schemeClr val="accent1"/>
+              </a:lnRef>
+              <a:fillRef idx="0">
+                <a:schemeClr val="accent1"/>
+              </a:fillRef>
+              <a:effectRef idx="0">
+                <a:schemeClr val="accent1"/>
+              </a:effectRef>
+              <a:fontRef idx="minor">
+                <a:schemeClr val="tx1"/>
+              </a:fontRef>
+            </p:style>
+          </p:cxnSp>
+          <p:cxnSp>
+            <p:nvCxnSpPr>
+              <p:cNvPr id="28" name="Straight Connector 27">
+                <a:extLst>
+                  <a:ext uri="{FF2B5EF4-FFF2-40B4-BE49-F238E27FC236}">
+                    <a16:creationId xmlns:a16="http://schemas.microsoft.com/office/drawing/2014/main" id="{DE10D7CA-623B-D445-EC46-21B2571BC34C}"/>
+                  </a:ext>
+                </a:extLst>
+              </p:cNvPr>
+              <p:cNvCxnSpPr>
+                <a:cxnSpLocks/>
+              </p:cNvCxnSpPr>
+              <p:nvPr/>
+            </p:nvCxnSpPr>
+            <p:spPr>
+              <a:xfrm rot="18900000" flipV="1">
+                <a:off x="1844231" y="869163"/>
+                <a:ext cx="0" cy="90000"/>
+              </a:xfrm>
+              <a:prstGeom prst="line">
+                <a:avLst/>
+              </a:prstGeom>
+              <a:ln w="15875"/>
+            </p:spPr>
+            <p:style>
+              <a:lnRef idx="1">
+                <a:schemeClr val="accent1"/>
+              </a:lnRef>
+              <a:fillRef idx="0">
+                <a:schemeClr val="accent1"/>
+              </a:fillRef>
+              <a:effectRef idx="0">
+                <a:schemeClr val="accent1"/>
+              </a:effectRef>
+              <a:fontRef idx="minor">
+                <a:schemeClr val="tx1"/>
+              </a:fontRef>
+            </p:style>
+          </p:cxnSp>
+        </p:grpSp>
+        <p:grpSp>
+          <p:nvGrpSpPr>
+            <p:cNvPr id="10" name="Group 9">
+              <a:extLst>
+                <a:ext uri="{FF2B5EF4-FFF2-40B4-BE49-F238E27FC236}">
+                  <a16:creationId xmlns:a16="http://schemas.microsoft.com/office/drawing/2014/main" id="{0114367C-18E4-6788-2AA8-AED0DE0B49E2}"/>
+                </a:ext>
+              </a:extLst>
+            </p:cNvPr>
+            <p:cNvGrpSpPr/>
+            <p:nvPr/>
+          </p:nvGrpSpPr>
+          <p:grpSpPr>
+            <a:xfrm>
+              <a:off x="383825" y="2445173"/>
+              <a:ext cx="68712" cy="92593"/>
+              <a:chOff x="1844231" y="869163"/>
+              <a:chExt cx="108640" cy="146399"/>
+            </a:xfrm>
+          </p:grpSpPr>
+          <p:cxnSp>
+            <p:nvCxnSpPr>
+              <p:cNvPr id="23" name="Straight Connector 22">
+                <a:extLst>
+                  <a:ext uri="{FF2B5EF4-FFF2-40B4-BE49-F238E27FC236}">
+                    <a16:creationId xmlns:a16="http://schemas.microsoft.com/office/drawing/2014/main" id="{F7EA4980-9742-645E-301F-1A61B72E6342}"/>
+                  </a:ext>
+                </a:extLst>
+              </p:cNvPr>
+              <p:cNvCxnSpPr/>
+              <p:nvPr/>
+            </p:nvCxnSpPr>
+            <p:spPr>
+              <a:xfrm>
+                <a:off x="1876425" y="871562"/>
+                <a:ext cx="0" cy="144000"/>
+              </a:xfrm>
+              <a:prstGeom prst="line">
+                <a:avLst/>
+              </a:prstGeom>
+              <a:ln w="15875"/>
+            </p:spPr>
+            <p:style>
+              <a:lnRef idx="1">
+                <a:schemeClr val="accent1"/>
+              </a:lnRef>
+              <a:fillRef idx="0">
+                <a:schemeClr val="accent1"/>
+              </a:fillRef>
+              <a:effectRef idx="0">
+                <a:schemeClr val="accent1"/>
+              </a:effectRef>
+              <a:fontRef idx="minor">
+                <a:schemeClr val="tx1"/>
+              </a:fontRef>
+            </p:style>
+          </p:cxnSp>
+          <p:cxnSp>
+            <p:nvCxnSpPr>
+              <p:cNvPr id="24" name="Straight Connector 23">
+                <a:extLst>
+                  <a:ext uri="{FF2B5EF4-FFF2-40B4-BE49-F238E27FC236}">
+                    <a16:creationId xmlns:a16="http://schemas.microsoft.com/office/drawing/2014/main" id="{7BEF0134-7823-AB11-AE5D-3162A9DE46BF}"/>
+                  </a:ext>
+                </a:extLst>
+              </p:cNvPr>
+              <p:cNvCxnSpPr>
+                <a:cxnSpLocks/>
+              </p:cNvCxnSpPr>
+              <p:nvPr/>
+            </p:nvCxnSpPr>
+            <p:spPr>
+              <a:xfrm rot="2700000">
+                <a:off x="1907871" y="872338"/>
+                <a:ext cx="0" cy="90000"/>
+              </a:xfrm>
+              <a:prstGeom prst="line">
+                <a:avLst/>
+              </a:prstGeom>
+              <a:ln w="15875"/>
+            </p:spPr>
+            <p:style>
+              <a:lnRef idx="1">
+                <a:schemeClr val="accent1"/>
+              </a:lnRef>
+              <a:fillRef idx="0">
+                <a:schemeClr val="accent1"/>
+              </a:fillRef>
+              <a:effectRef idx="0">
+                <a:schemeClr val="accent1"/>
+              </a:effectRef>
+              <a:fontRef idx="minor">
+                <a:schemeClr val="tx1"/>
+              </a:fontRef>
+            </p:style>
+          </p:cxnSp>
+          <p:cxnSp>
+            <p:nvCxnSpPr>
+              <p:cNvPr id="25" name="Straight Connector 24">
+                <a:extLst>
+                  <a:ext uri="{FF2B5EF4-FFF2-40B4-BE49-F238E27FC236}">
+                    <a16:creationId xmlns:a16="http://schemas.microsoft.com/office/drawing/2014/main" id="{2977D4BD-4EA8-77B4-E7F3-4F280932956C}"/>
+                  </a:ext>
+                </a:extLst>
+              </p:cNvPr>
+              <p:cNvCxnSpPr>
+                <a:cxnSpLocks/>
+              </p:cNvCxnSpPr>
+              <p:nvPr/>
+            </p:nvCxnSpPr>
+            <p:spPr>
+              <a:xfrm rot="18900000" flipV="1">
+                <a:off x="1844231" y="869163"/>
+                <a:ext cx="0" cy="90000"/>
+              </a:xfrm>
+              <a:prstGeom prst="line">
+                <a:avLst/>
+              </a:prstGeom>
+              <a:ln w="15875"/>
+            </p:spPr>
+            <p:style>
+              <a:lnRef idx="1">
+                <a:schemeClr val="accent1"/>
+              </a:lnRef>
+              <a:fillRef idx="0">
+                <a:schemeClr val="accent1"/>
+              </a:fillRef>
+              <a:effectRef idx="0">
+                <a:schemeClr val="accent1"/>
+              </a:effectRef>
+              <a:fontRef idx="minor">
+                <a:schemeClr val="tx1"/>
+              </a:fontRef>
+            </p:style>
+          </p:cxnSp>
+        </p:grpSp>
+        <p:grpSp>
+          <p:nvGrpSpPr>
+            <p:cNvPr id="11" name="Group 10">
+              <a:extLst>
+                <a:ext uri="{FF2B5EF4-FFF2-40B4-BE49-F238E27FC236}">
+                  <a16:creationId xmlns:a16="http://schemas.microsoft.com/office/drawing/2014/main" id="{8E608B12-8E51-E12A-30C4-77AFEBE3A360}"/>
+                </a:ext>
+              </a:extLst>
+            </p:cNvPr>
+            <p:cNvGrpSpPr/>
+            <p:nvPr/>
+          </p:nvGrpSpPr>
+          <p:grpSpPr>
+            <a:xfrm>
+              <a:off x="646611" y="1868587"/>
+              <a:ext cx="68712" cy="92593"/>
+              <a:chOff x="1844231" y="869163"/>
+              <a:chExt cx="108640" cy="146399"/>
+            </a:xfrm>
+          </p:grpSpPr>
+          <p:cxnSp>
+            <p:nvCxnSpPr>
+              <p:cNvPr id="20" name="Straight Connector 19">
+                <a:extLst>
+                  <a:ext uri="{FF2B5EF4-FFF2-40B4-BE49-F238E27FC236}">
+                    <a16:creationId xmlns:a16="http://schemas.microsoft.com/office/drawing/2014/main" id="{354466FC-08C3-BBE7-8E1A-4A5A806F2C58}"/>
+                  </a:ext>
+                </a:extLst>
+              </p:cNvPr>
+              <p:cNvCxnSpPr/>
+              <p:nvPr/>
+            </p:nvCxnSpPr>
+            <p:spPr>
+              <a:xfrm>
+                <a:off x="1876425" y="871562"/>
+                <a:ext cx="0" cy="144000"/>
+              </a:xfrm>
+              <a:prstGeom prst="line">
+                <a:avLst/>
+              </a:prstGeom>
+              <a:ln w="15875"/>
+            </p:spPr>
+            <p:style>
+              <a:lnRef idx="1">
+                <a:schemeClr val="accent1"/>
+              </a:lnRef>
+              <a:fillRef idx="0">
+                <a:schemeClr val="accent1"/>
+              </a:fillRef>
+              <a:effectRef idx="0">
+                <a:schemeClr val="accent1"/>
+              </a:effectRef>
+              <a:fontRef idx="minor">
+                <a:schemeClr val="tx1"/>
+              </a:fontRef>
+            </p:style>
+          </p:cxnSp>
+          <p:cxnSp>
+            <p:nvCxnSpPr>
+              <p:cNvPr id="21" name="Straight Connector 20">
+                <a:extLst>
+                  <a:ext uri="{FF2B5EF4-FFF2-40B4-BE49-F238E27FC236}">
+                    <a16:creationId xmlns:a16="http://schemas.microsoft.com/office/drawing/2014/main" id="{962916AA-7059-8B8C-B769-734642AE0A07}"/>
+                  </a:ext>
+                </a:extLst>
+              </p:cNvPr>
+              <p:cNvCxnSpPr>
+                <a:cxnSpLocks/>
+              </p:cNvCxnSpPr>
+              <p:nvPr/>
+            </p:nvCxnSpPr>
+            <p:spPr>
+              <a:xfrm rot="2700000">
+                <a:off x="1907871" y="872338"/>
+                <a:ext cx="0" cy="90000"/>
+              </a:xfrm>
+              <a:prstGeom prst="line">
+                <a:avLst/>
+              </a:prstGeom>
+              <a:ln w="15875"/>
+            </p:spPr>
+            <p:style>
+              <a:lnRef idx="1">
+                <a:schemeClr val="accent1"/>
+              </a:lnRef>
+              <a:fillRef idx="0">
+                <a:schemeClr val="accent1"/>
+              </a:fillRef>
+              <a:effectRef idx="0">
+                <a:schemeClr val="accent1"/>
+              </a:effectRef>
+              <a:fontRef idx="minor">
+                <a:schemeClr val="tx1"/>
+              </a:fontRef>
+            </p:style>
+          </p:cxnSp>
+          <p:cxnSp>
+            <p:nvCxnSpPr>
+              <p:cNvPr id="22" name="Straight Connector 21">
+                <a:extLst>
+                  <a:ext uri="{FF2B5EF4-FFF2-40B4-BE49-F238E27FC236}">
+                    <a16:creationId xmlns:a16="http://schemas.microsoft.com/office/drawing/2014/main" id="{5559DBC1-3D85-5CDC-B8C3-EEC9294FEA6B}"/>
+                  </a:ext>
+                </a:extLst>
+              </p:cNvPr>
+              <p:cNvCxnSpPr>
+                <a:cxnSpLocks/>
+              </p:cNvCxnSpPr>
+              <p:nvPr/>
+            </p:nvCxnSpPr>
+            <p:spPr>
+              <a:xfrm rot="18900000" flipV="1">
+                <a:off x="1844231" y="869163"/>
+                <a:ext cx="0" cy="90000"/>
+              </a:xfrm>
+              <a:prstGeom prst="line">
+                <a:avLst/>
+              </a:prstGeom>
+              <a:ln w="15875"/>
+            </p:spPr>
+            <p:style>
+              <a:lnRef idx="1">
+                <a:schemeClr val="accent1"/>
+              </a:lnRef>
+              <a:fillRef idx="0">
+                <a:schemeClr val="accent1"/>
+              </a:fillRef>
+              <a:effectRef idx="0">
+                <a:schemeClr val="accent1"/>
+              </a:effectRef>
+              <a:fontRef idx="minor">
+                <a:schemeClr val="tx1"/>
+              </a:fontRef>
+            </p:style>
+          </p:cxnSp>
+        </p:grpSp>
+        <p:grpSp>
+          <p:nvGrpSpPr>
+            <p:cNvPr id="12" name="Group 11">
+              <a:extLst>
+                <a:ext uri="{FF2B5EF4-FFF2-40B4-BE49-F238E27FC236}">
+                  <a16:creationId xmlns:a16="http://schemas.microsoft.com/office/drawing/2014/main" id="{B0418436-CDE7-21C6-49D0-5A62C0954AE5}"/>
+                </a:ext>
+              </a:extLst>
+            </p:cNvPr>
+            <p:cNvGrpSpPr/>
+            <p:nvPr/>
+          </p:nvGrpSpPr>
+          <p:grpSpPr>
+            <a:xfrm>
+              <a:off x="645451" y="2148533"/>
+              <a:ext cx="68712" cy="92593"/>
+              <a:chOff x="1844231" y="869163"/>
+              <a:chExt cx="108640" cy="146399"/>
+            </a:xfrm>
+          </p:grpSpPr>
+          <p:cxnSp>
+            <p:nvCxnSpPr>
+              <p:cNvPr id="17" name="Straight Connector 16">
+                <a:extLst>
+                  <a:ext uri="{FF2B5EF4-FFF2-40B4-BE49-F238E27FC236}">
+                    <a16:creationId xmlns:a16="http://schemas.microsoft.com/office/drawing/2014/main" id="{7CBFF039-43BA-3277-E280-614163F66740}"/>
+                  </a:ext>
+                </a:extLst>
+              </p:cNvPr>
+              <p:cNvCxnSpPr/>
+              <p:nvPr/>
+            </p:nvCxnSpPr>
+            <p:spPr>
+              <a:xfrm>
+                <a:off x="1876425" y="871562"/>
+                <a:ext cx="0" cy="144000"/>
+              </a:xfrm>
+              <a:prstGeom prst="line">
+                <a:avLst/>
+              </a:prstGeom>
+              <a:ln w="15875"/>
+            </p:spPr>
+            <p:style>
+              <a:lnRef idx="1">
+                <a:schemeClr val="accent1"/>
+              </a:lnRef>
+              <a:fillRef idx="0">
+                <a:schemeClr val="accent1"/>
+              </a:fillRef>
+              <a:effectRef idx="0">
+                <a:schemeClr val="accent1"/>
+              </a:effectRef>
+              <a:fontRef idx="minor">
+                <a:schemeClr val="tx1"/>
+              </a:fontRef>
+            </p:style>
+          </p:cxnSp>
+          <p:cxnSp>
+            <p:nvCxnSpPr>
+              <p:cNvPr id="18" name="Straight Connector 17">
+                <a:extLst>
+                  <a:ext uri="{FF2B5EF4-FFF2-40B4-BE49-F238E27FC236}">
+                    <a16:creationId xmlns:a16="http://schemas.microsoft.com/office/drawing/2014/main" id="{25F80A6C-97E1-D635-132A-A635B8C939CF}"/>
+                  </a:ext>
+                </a:extLst>
+              </p:cNvPr>
+              <p:cNvCxnSpPr>
+                <a:cxnSpLocks/>
+              </p:cNvCxnSpPr>
+              <p:nvPr/>
+            </p:nvCxnSpPr>
+            <p:spPr>
+              <a:xfrm rot="2700000">
+                <a:off x="1907871" y="872338"/>
+                <a:ext cx="0" cy="90000"/>
+              </a:xfrm>
+              <a:prstGeom prst="line">
+                <a:avLst/>
+              </a:prstGeom>
+              <a:ln w="15875"/>
+            </p:spPr>
+            <p:style>
+              <a:lnRef idx="1">
+                <a:schemeClr val="accent1"/>
+              </a:lnRef>
+              <a:fillRef idx="0">
+                <a:schemeClr val="accent1"/>
+              </a:fillRef>
+              <a:effectRef idx="0">
+                <a:schemeClr val="accent1"/>
+              </a:effectRef>
+              <a:fontRef idx="minor">
+                <a:schemeClr val="tx1"/>
+              </a:fontRef>
+            </p:style>
+          </p:cxnSp>
+          <p:cxnSp>
+            <p:nvCxnSpPr>
+              <p:cNvPr id="19" name="Straight Connector 18">
+                <a:extLst>
+                  <a:ext uri="{FF2B5EF4-FFF2-40B4-BE49-F238E27FC236}">
+                    <a16:creationId xmlns:a16="http://schemas.microsoft.com/office/drawing/2014/main" id="{940F36E9-12DD-324F-8D05-18DF66721E53}"/>
+                  </a:ext>
+                </a:extLst>
+              </p:cNvPr>
+              <p:cNvCxnSpPr>
+                <a:cxnSpLocks/>
+              </p:cNvCxnSpPr>
+              <p:nvPr/>
+            </p:nvCxnSpPr>
+            <p:spPr>
+              <a:xfrm rot="18900000" flipV="1">
+                <a:off x="1844231" y="869163"/>
+                <a:ext cx="0" cy="90000"/>
+              </a:xfrm>
+              <a:prstGeom prst="line">
+                <a:avLst/>
+              </a:prstGeom>
+              <a:ln w="15875"/>
+            </p:spPr>
+            <p:style>
+              <a:lnRef idx="1">
+                <a:schemeClr val="accent1"/>
+              </a:lnRef>
+              <a:fillRef idx="0">
+                <a:schemeClr val="accent1"/>
+              </a:fillRef>
+              <a:effectRef idx="0">
+                <a:schemeClr val="accent1"/>
+              </a:effectRef>
+              <a:fontRef idx="minor">
+                <a:schemeClr val="tx1"/>
+              </a:fontRef>
+            </p:style>
+          </p:cxnSp>
+        </p:grpSp>
+        <p:grpSp>
+          <p:nvGrpSpPr>
+            <p:cNvPr id="13" name="Group 12">
+              <a:extLst>
+                <a:ext uri="{FF2B5EF4-FFF2-40B4-BE49-F238E27FC236}">
+                  <a16:creationId xmlns:a16="http://schemas.microsoft.com/office/drawing/2014/main" id="{0FE26CB3-28F2-A783-54E2-CBF541D80CFF}"/>
+                </a:ext>
+              </a:extLst>
+            </p:cNvPr>
+            <p:cNvGrpSpPr/>
+            <p:nvPr/>
+          </p:nvGrpSpPr>
+          <p:grpSpPr>
+            <a:xfrm>
+              <a:off x="649535" y="2445173"/>
+              <a:ext cx="68712" cy="92593"/>
+              <a:chOff x="1844231" y="869163"/>
+              <a:chExt cx="108640" cy="146399"/>
+            </a:xfrm>
+          </p:grpSpPr>
+          <p:cxnSp>
+            <p:nvCxnSpPr>
+              <p:cNvPr id="14" name="Straight Connector 13">
+                <a:extLst>
+                  <a:ext uri="{FF2B5EF4-FFF2-40B4-BE49-F238E27FC236}">
+                    <a16:creationId xmlns:a16="http://schemas.microsoft.com/office/drawing/2014/main" id="{61BCDD34-670E-2546-305E-470FD484AA21}"/>
+                  </a:ext>
+                </a:extLst>
+              </p:cNvPr>
+              <p:cNvCxnSpPr/>
+              <p:nvPr/>
+            </p:nvCxnSpPr>
+            <p:spPr>
+              <a:xfrm>
+                <a:off x="1876425" y="871562"/>
+                <a:ext cx="0" cy="144000"/>
+              </a:xfrm>
+              <a:prstGeom prst="line">
+                <a:avLst/>
+              </a:prstGeom>
+              <a:ln w="15875"/>
+            </p:spPr>
+            <p:style>
+              <a:lnRef idx="1">
+                <a:schemeClr val="accent1"/>
+              </a:lnRef>
+              <a:fillRef idx="0">
+                <a:schemeClr val="accent1"/>
+              </a:fillRef>
+              <a:effectRef idx="0">
+                <a:schemeClr val="accent1"/>
+              </a:effectRef>
+              <a:fontRef idx="minor">
+                <a:schemeClr val="tx1"/>
+              </a:fontRef>
+            </p:style>
+          </p:cxnSp>
+          <p:cxnSp>
+            <p:nvCxnSpPr>
+              <p:cNvPr id="15" name="Straight Connector 14">
+                <a:extLst>
+                  <a:ext uri="{FF2B5EF4-FFF2-40B4-BE49-F238E27FC236}">
+                    <a16:creationId xmlns:a16="http://schemas.microsoft.com/office/drawing/2014/main" id="{15E65F67-F7E9-1C4A-F097-C414680E64CD}"/>
+                  </a:ext>
+                </a:extLst>
+              </p:cNvPr>
+              <p:cNvCxnSpPr>
+                <a:cxnSpLocks/>
+              </p:cNvCxnSpPr>
+              <p:nvPr/>
+            </p:nvCxnSpPr>
+            <p:spPr>
+              <a:xfrm rot="2700000">
+                <a:off x="1907871" y="872338"/>
+                <a:ext cx="0" cy="90000"/>
+              </a:xfrm>
+              <a:prstGeom prst="line">
+                <a:avLst/>
+              </a:prstGeom>
+              <a:ln w="15875"/>
+            </p:spPr>
+            <p:style>
+              <a:lnRef idx="1">
+                <a:schemeClr val="accent1"/>
+              </a:lnRef>
+              <a:fillRef idx="0">
+                <a:schemeClr val="accent1"/>
+              </a:fillRef>
+              <a:effectRef idx="0">
+                <a:schemeClr val="accent1"/>
+              </a:effectRef>
+              <a:fontRef idx="minor">
+                <a:schemeClr val="tx1"/>
+              </a:fontRef>
+            </p:style>
+          </p:cxnSp>
+          <p:cxnSp>
+            <p:nvCxnSpPr>
+              <p:cNvPr id="16" name="Straight Connector 15">
+                <a:extLst>
+                  <a:ext uri="{FF2B5EF4-FFF2-40B4-BE49-F238E27FC236}">
+                    <a16:creationId xmlns:a16="http://schemas.microsoft.com/office/drawing/2014/main" id="{833F4721-C8C8-F848-46B2-3C10A15BE872}"/>
+                  </a:ext>
+                </a:extLst>
+              </p:cNvPr>
+              <p:cNvCxnSpPr>
+                <a:cxnSpLocks/>
+              </p:cNvCxnSpPr>
+              <p:nvPr/>
+            </p:nvCxnSpPr>
+            <p:spPr>
+              <a:xfrm rot="18900000" flipV="1">
+                <a:off x="1844231" y="869163"/>
+                <a:ext cx="0" cy="90000"/>
+              </a:xfrm>
+              <a:prstGeom prst="line">
+                <a:avLst/>
+              </a:prstGeom>
+              <a:ln w="15875"/>
+            </p:spPr>
+            <p:style>
+              <a:lnRef idx="1">
+                <a:schemeClr val="accent1"/>
+              </a:lnRef>
+              <a:fillRef idx="0">
+                <a:schemeClr val="accent1"/>
+              </a:fillRef>
+              <a:effectRef idx="0">
+                <a:schemeClr val="accent1"/>
+              </a:effectRef>
+              <a:fontRef idx="minor">
+                <a:schemeClr val="tx1"/>
+              </a:fontRef>
+            </p:style>
+          </p:cxnSp>
+        </p:grpSp>
+      </p:grpSp>
+      <p:pic>
+        <p:nvPicPr>
+          <p:cNvPr id="41" name="Picture 40">
+            <a:extLst>
+              <a:ext uri="{FF2B5EF4-FFF2-40B4-BE49-F238E27FC236}">
+                <a16:creationId xmlns:a16="http://schemas.microsoft.com/office/drawing/2014/main" id="{E89F9473-8D8A-78DD-E0EF-9607B82BC36A}"/>
+              </a:ext>
+            </a:extLst>
+          </p:cNvPr>
+          <p:cNvPicPr>
+            <a:picLocks noChangeAspect="1"/>
+          </p:cNvPicPr>
+          <p:nvPr/>
+        </p:nvPicPr>
+        <p:blipFill>
+          <a:blip r:embed="rId2"/>
+          <a:stretch>
+            <a:fillRect/>
+          </a:stretch>
+        </p:blipFill>
+        <p:spPr>
+          <a:xfrm>
+            <a:off x="2805353" y="1081983"/>
+            <a:ext cx="1152529" cy="1181800"/>
+          </a:xfrm>
+          <a:prstGeom prst="rect">
+            <a:avLst/>
+          </a:prstGeom>
+        </p:spPr>
+      </p:pic>
+      <p:sp>
+        <p:nvSpPr>
+          <p:cNvPr id="42" name="TextBox 41">
+            <a:extLst>
+              <a:ext uri="{FF2B5EF4-FFF2-40B4-BE49-F238E27FC236}">
+                <a16:creationId xmlns:a16="http://schemas.microsoft.com/office/drawing/2014/main" id="{E3A95278-6422-D38B-B63B-AAB3F71BC29B}"/>
+              </a:ext>
+            </a:extLst>
+          </p:cNvPr>
+          <p:cNvSpPr txBox="1"/>
+          <p:nvPr/>
+        </p:nvSpPr>
+        <p:spPr>
+          <a:xfrm>
+            <a:off x="2897016" y="719155"/>
+            <a:ext cx="868320" cy="369332"/>
+          </a:xfrm>
+          <a:prstGeom prst="rect">
+            <a:avLst/>
+          </a:prstGeom>
+          <a:noFill/>
+        </p:spPr>
+        <p:txBody>
+          <a:bodyPr wrap="square">
+            <a:spAutoFit/>
+          </a:bodyPr>
+          <a:lstStyle/>
+          <a:p>
+            <a:pPr algn="ctr"/>
+            <a:r>
+              <a:rPr lang="en-GB" sz="1800" b="0" strike="noStrike" spc="-1" noProof="0" dirty="0">
+                <a:solidFill>
+                  <a:srgbClr val="000000"/>
+                </a:solidFill>
+                <a:latin typeface="Calibri"/>
+              </a:rPr>
+              <a:t>SIM 1</a:t>
+            </a:r>
+            <a:endParaRPr lang="en-GB" noProof="0" dirty="0"/>
+          </a:p>
+        </p:txBody>
+      </p:sp>
+      <p:pic>
+        <p:nvPicPr>
+          <p:cNvPr id="43" name="Picture 42">
+            <a:extLst>
+              <a:ext uri="{FF2B5EF4-FFF2-40B4-BE49-F238E27FC236}">
+                <a16:creationId xmlns:a16="http://schemas.microsoft.com/office/drawing/2014/main" id="{B6BB01D1-9BA2-F786-49D4-D05A9C42A5EA}"/>
+              </a:ext>
+            </a:extLst>
+          </p:cNvPr>
+          <p:cNvPicPr>
+            <a:picLocks noChangeAspect="1"/>
+          </p:cNvPicPr>
+          <p:nvPr/>
+        </p:nvPicPr>
+        <p:blipFill>
+          <a:blip r:embed="rId2"/>
+          <a:stretch>
+            <a:fillRect/>
+          </a:stretch>
+        </p:blipFill>
+        <p:spPr>
+          <a:xfrm>
+            <a:off x="1298246" y="487131"/>
+            <a:ext cx="1152529" cy="1181800"/>
+          </a:xfrm>
+          <a:prstGeom prst="rect">
+            <a:avLst/>
+          </a:prstGeom>
+        </p:spPr>
+      </p:pic>
+      <p:sp>
+        <p:nvSpPr>
+          <p:cNvPr id="44" name="TextBox 43">
+            <a:extLst>
+              <a:ext uri="{FF2B5EF4-FFF2-40B4-BE49-F238E27FC236}">
+                <a16:creationId xmlns:a16="http://schemas.microsoft.com/office/drawing/2014/main" id="{AB081BDE-9F8A-8A16-9916-FA2FFE409D7D}"/>
+              </a:ext>
+            </a:extLst>
+          </p:cNvPr>
+          <p:cNvSpPr txBox="1"/>
+          <p:nvPr/>
+        </p:nvSpPr>
+        <p:spPr>
+          <a:xfrm>
+            <a:off x="1502032" y="0"/>
+            <a:ext cx="868320" cy="369332"/>
+          </a:xfrm>
+          <a:prstGeom prst="rect">
+            <a:avLst/>
+          </a:prstGeom>
+          <a:noFill/>
+        </p:spPr>
+        <p:txBody>
+          <a:bodyPr wrap="square">
+            <a:spAutoFit/>
+          </a:bodyPr>
+          <a:lstStyle/>
+          <a:p>
+            <a:pPr algn="ctr"/>
+            <a:r>
+              <a:rPr lang="en-GB" sz="1800" b="0" strike="noStrike" spc="-1" noProof="0" dirty="0">
+                <a:solidFill>
+                  <a:srgbClr val="000000"/>
+                </a:solidFill>
+                <a:latin typeface="Calibri"/>
+              </a:rPr>
+              <a:t>SIM 2</a:t>
+            </a:r>
+            <a:endParaRPr lang="en-GB" noProof="0" dirty="0"/>
+          </a:p>
+        </p:txBody>
+      </p:sp>
+      <mc:AlternateContent xmlns:mc="http://schemas.openxmlformats.org/markup-compatibility/2006">
+        <mc:Choice xmlns:a14="http://schemas.microsoft.com/office/drawing/2010/main" Requires="a14">
+          <p:sp>
+            <p:nvSpPr>
+              <p:cNvPr id="45" name="TextBox 44">
+                <a:extLst>
+                  <a:ext uri="{FF2B5EF4-FFF2-40B4-BE49-F238E27FC236}">
+                    <a16:creationId xmlns:a16="http://schemas.microsoft.com/office/drawing/2014/main" id="{7BC68EAB-6BF8-F65C-2EB6-02A33A29EC1E}"/>
+                  </a:ext>
+                </a:extLst>
+              </p:cNvPr>
+              <p:cNvSpPr txBox="1"/>
+              <p:nvPr/>
+            </p:nvSpPr>
+            <p:spPr>
+              <a:xfrm>
+                <a:off x="3115585" y="1264704"/>
+                <a:ext cx="607687" cy="369332"/>
+              </a:xfrm>
+              <a:prstGeom prst="rect">
+                <a:avLst/>
+              </a:prstGeom>
+              <a:noFill/>
+            </p:spPr>
+            <p:txBody>
+              <a:bodyPr wrap="square">
+                <a:spAutoFit/>
+              </a:bodyPr>
+              <a:lstStyle/>
+              <a:p>
+                <a:pPr/>
+                <a14:m>
+                  <m:oMathPara xmlns:m="http://schemas.openxmlformats.org/officeDocument/2006/math">
+                    <m:oMathParaPr>
+                      <m:jc m:val="centerGroup"/>
+                    </m:oMathParaPr>
+                    <m:oMath xmlns:m="http://schemas.openxmlformats.org/officeDocument/2006/math">
+                      <m:r>
+                        <a:rPr lang="en-GB" b="1" i="1" noProof="0" smtClean="0">
+                          <a:latin typeface="Cambria Math" panose="02040503050406030204" pitchFamily="18" charset="0"/>
+                          <a:ea typeface="Cambria Math" panose="02040503050406030204" pitchFamily="18" charset="0"/>
+                        </a:rPr>
+                        <m:t>𝕴</m:t>
+                      </m:r>
+                      <m:d>
+                        <m:dPr>
+                          <m:ctrlPr>
+                            <a:rPr lang="en-GB" i="1" noProof="0" smtClean="0">
+                              <a:latin typeface="Cambria Math" panose="02040503050406030204" pitchFamily="18" charset="0"/>
+                            </a:rPr>
+                          </m:ctrlPr>
+                        </m:dPr>
+                        <m:e>
+                          <m:r>
+                            <a:rPr lang="en-GB" i="1" noProof="0" smtClean="0">
+                              <a:latin typeface="Cambria Math" panose="02040503050406030204" pitchFamily="18" charset="0"/>
+                            </a:rPr>
+                            <m:t>𝑡</m:t>
+                          </m:r>
+                        </m:e>
+                      </m:d>
+                    </m:oMath>
+                  </m:oMathPara>
+                </a14:m>
+                <a:endParaRPr lang="en-GB" dirty="0"/>
+              </a:p>
+            </p:txBody>
+          </p:sp>
+        </mc:Choice>
+        <mc:Fallback>
+          <p:sp>
+            <p:nvSpPr>
+              <p:cNvPr id="45" name="TextBox 44">
+                <a:extLst>
+                  <a:ext uri="{FF2B5EF4-FFF2-40B4-BE49-F238E27FC236}">
+                    <a16:creationId xmlns:a16="http://schemas.microsoft.com/office/drawing/2014/main" id="{7BC68EAB-6BF8-F65C-2EB6-02A33A29EC1E}"/>
+                  </a:ext>
+                </a:extLst>
+              </p:cNvPr>
+              <p:cNvSpPr txBox="1">
+                <a:spLocks noRot="1" noChangeAspect="1" noMove="1" noResize="1" noEditPoints="1" noAdjustHandles="1" noChangeArrowheads="1" noChangeShapeType="1" noTextEdit="1"/>
+              </p:cNvSpPr>
+              <p:nvPr/>
+            </p:nvSpPr>
+            <p:spPr>
+              <a:xfrm>
+                <a:off x="3115585" y="1264704"/>
+                <a:ext cx="607687" cy="369332"/>
+              </a:xfrm>
+              <a:prstGeom prst="rect">
+                <a:avLst/>
+              </a:prstGeom>
+              <a:blipFill>
+                <a:blip r:embed="rId3"/>
+                <a:stretch>
+                  <a:fillRect/>
+                </a:stretch>
+              </a:blipFill>
+            </p:spPr>
+            <p:txBody>
+              <a:bodyPr/>
+              <a:lstStyle/>
+              <a:p>
+                <a:r>
+                  <a:rPr lang="en-US">
+                    <a:noFill/>
+                  </a:rPr>
+                  <a:t> </a:t>
+                </a:r>
+              </a:p>
+            </p:txBody>
+          </p:sp>
+        </mc:Fallback>
+      </mc:AlternateContent>
+      <p:sp>
+        <p:nvSpPr>
+          <p:cNvPr id="46" name="TextBox 45">
+            <a:extLst>
+              <a:ext uri="{FF2B5EF4-FFF2-40B4-BE49-F238E27FC236}">
+                <a16:creationId xmlns:a16="http://schemas.microsoft.com/office/drawing/2014/main" id="{CE1F21BA-3F19-5AF5-65E9-221E2D90ED7F}"/>
+              </a:ext>
+            </a:extLst>
+          </p:cNvPr>
+          <p:cNvSpPr txBox="1"/>
+          <p:nvPr/>
+        </p:nvSpPr>
+        <p:spPr>
+          <a:xfrm>
+            <a:off x="1480824" y="744445"/>
+            <a:ext cx="841897" cy="523220"/>
+          </a:xfrm>
+          <a:prstGeom prst="rect">
+            <a:avLst/>
+          </a:prstGeom>
+          <a:solidFill>
+            <a:srgbClr val="FFFFFF">
+              <a:alpha val="34000"/>
+            </a:srgbClr>
+          </a:solidFill>
+        </p:spPr>
+        <p:txBody>
+          <a:bodyPr wrap="none" rtlCol="0">
+            <a:spAutoFit/>
+          </a:bodyPr>
+          <a:lstStyle/>
+          <a:p>
+            <a:pPr algn="ctr"/>
+            <a:r>
+              <a:rPr lang="en-GB" sz="1400" dirty="0"/>
+              <a:t>Neural</a:t>
+            </a:r>
+          </a:p>
+          <a:p>
+            <a:pPr algn="ctr"/>
+            <a:r>
+              <a:rPr lang="en-GB" sz="1400" dirty="0"/>
+              <a:t>Network</a:t>
+            </a:r>
+          </a:p>
+        </p:txBody>
+      </p:sp>
+      <p:sp>
+        <p:nvSpPr>
+          <p:cNvPr id="47" name="Rectangle: Rounded Corners 46">
+            <a:extLst>
+              <a:ext uri="{FF2B5EF4-FFF2-40B4-BE49-F238E27FC236}">
+                <a16:creationId xmlns:a16="http://schemas.microsoft.com/office/drawing/2014/main" id="{44147037-78CE-E6B0-FAD7-23E1878C4FCD}"/>
+              </a:ext>
+            </a:extLst>
+          </p:cNvPr>
+          <p:cNvSpPr/>
+          <p:nvPr/>
+        </p:nvSpPr>
+        <p:spPr>
+          <a:xfrm>
+            <a:off x="1849307" y="2880045"/>
+            <a:ext cx="986643" cy="616322"/>
+          </a:xfrm>
+          <a:prstGeom prst="roundRect">
+            <a:avLst/>
+          </a:prstGeom>
+          <a:noFill/>
+          <a:ln w="19050"/>
+        </p:spPr>
+        <p:style>
+          <a:lnRef idx="2">
+            <a:schemeClr val="accent1">
+              <a:shade val="15000"/>
+            </a:schemeClr>
+          </a:lnRef>
+          <a:fillRef idx="1">
+            <a:schemeClr val="accent1"/>
+          </a:fillRef>
+          <a:effectRef idx="0">
+            <a:schemeClr val="accent1"/>
+          </a:effectRef>
+          <a:fontRef idx="minor">
+            <a:schemeClr val="lt1"/>
+          </a:fontRef>
+        </p:style>
+        <p:txBody>
+          <a:bodyPr rtlCol="0" anchor="ctr"/>
+          <a:lstStyle/>
+          <a:p>
+            <a:pPr algn="ctr"/>
+            <a:endParaRPr lang="en-US"/>
+          </a:p>
+        </p:txBody>
+      </p:sp>
+      <p:cxnSp>
+        <p:nvCxnSpPr>
+          <p:cNvPr id="48" name="Connector: Elbow 47">
+            <a:extLst>
+              <a:ext uri="{FF2B5EF4-FFF2-40B4-BE49-F238E27FC236}">
+                <a16:creationId xmlns:a16="http://schemas.microsoft.com/office/drawing/2014/main" id="{AC67BD49-E104-E274-6860-0F2879BC996F}"/>
+              </a:ext>
+            </a:extLst>
+          </p:cNvPr>
+          <p:cNvCxnSpPr>
+            <a:cxnSpLocks/>
+            <a:stCxn id="47" idx="3"/>
+          </p:cNvCxnSpPr>
+          <p:nvPr/>
+        </p:nvCxnSpPr>
+        <p:spPr>
+          <a:xfrm flipV="1">
+            <a:off x="2835950" y="2222661"/>
+            <a:ext cx="221955" cy="965545"/>
+          </a:xfrm>
+          <a:prstGeom prst="bentConnector2">
+            <a:avLst/>
+          </a:prstGeom>
+          <a:ln w="15875">
+            <a:solidFill>
+              <a:schemeClr val="tx1"/>
+            </a:solidFill>
+            <a:prstDash val="dash"/>
+            <a:tailEnd type="triangle"/>
+          </a:ln>
+        </p:spPr>
+        <p:style>
+          <a:lnRef idx="1">
+            <a:schemeClr val="accent1"/>
+          </a:lnRef>
+          <a:fillRef idx="0">
+            <a:schemeClr val="accent1"/>
+          </a:fillRef>
+          <a:effectRef idx="0">
+            <a:schemeClr val="accent1"/>
+          </a:effectRef>
+          <a:fontRef idx="minor">
+            <a:schemeClr val="tx1"/>
+          </a:fontRef>
+        </p:style>
+      </p:cxnSp>
+      <mc:AlternateContent xmlns:mc="http://schemas.openxmlformats.org/markup-compatibility/2006">
+        <mc:Choice xmlns:a14="http://schemas.microsoft.com/office/drawing/2010/main" Requires="a14">
+          <p:sp>
+            <p:nvSpPr>
+              <p:cNvPr id="49" name="TextBox 48">
+                <a:extLst>
+                  <a:ext uri="{FF2B5EF4-FFF2-40B4-BE49-F238E27FC236}">
+                    <a16:creationId xmlns:a16="http://schemas.microsoft.com/office/drawing/2014/main" id="{D8A5B424-6BC4-F711-7ADD-6CFD1A8F11C0}"/>
+                  </a:ext>
+                </a:extLst>
+              </p:cNvPr>
+              <p:cNvSpPr txBox="1"/>
+              <p:nvPr/>
+            </p:nvSpPr>
+            <p:spPr>
+              <a:xfrm>
+                <a:off x="3187516" y="2610447"/>
+                <a:ext cx="802419" cy="381515"/>
+              </a:xfrm>
+              <a:prstGeom prst="rect">
+                <a:avLst/>
+              </a:prstGeom>
+              <a:solidFill>
+                <a:srgbClr val="FFFFFF">
+                  <a:alpha val="85000"/>
+                </a:srgbClr>
+              </a:solidFill>
+              <a:ln>
+                <a:solidFill>
+                  <a:schemeClr val="tx1"/>
+                </a:solidFill>
+              </a:ln>
+            </p:spPr>
+            <p:txBody>
+              <a:bodyPr wrap="square">
+                <a:spAutoFit/>
+              </a:bodyPr>
+              <a:lstStyle/>
+              <a:p>
+                <a:pPr/>
+                <a14:m>
+                  <m:oMathPara xmlns:m="http://schemas.openxmlformats.org/officeDocument/2006/math">
+                    <m:oMathParaPr>
+                      <m:jc m:val="centerGroup"/>
+                    </m:oMathParaPr>
+                    <m:oMath xmlns:m="http://schemas.openxmlformats.org/officeDocument/2006/math">
+                      <m:sSub>
+                        <m:sSubPr>
+                          <m:ctrlPr>
+                            <a:rPr lang="en-GB" b="1" i="1" noProof="0" smtClean="0">
+                              <a:latin typeface="Cambria Math" panose="02040503050406030204" pitchFamily="18" charset="0"/>
+                            </a:rPr>
+                          </m:ctrlPr>
+                        </m:sSubPr>
+                        <m:e>
+                          <m:r>
+                            <a:rPr lang="en-GB" b="1" i="1" noProof="0" smtClean="0">
+                              <a:latin typeface="Cambria Math" panose="02040503050406030204" pitchFamily="18" charset="0"/>
+                              <a:ea typeface="Cambria Math" panose="02040503050406030204" pitchFamily="18" charset="0"/>
+                            </a:rPr>
+                            <m:t>𝜰</m:t>
+                          </m:r>
+                        </m:e>
+                        <m:sub>
+                          <m:r>
+                            <a:rPr lang="en-GB" b="1" i="1" noProof="0" smtClean="0">
+                              <a:latin typeface="Cambria Math" panose="02040503050406030204" pitchFamily="18" charset="0"/>
+                              <a:ea typeface="Cambria Math" panose="02040503050406030204" pitchFamily="18" charset="0"/>
+                            </a:rPr>
+                            <m:t>0</m:t>
+                          </m:r>
+                        </m:sub>
+                      </m:sSub>
+                      <m:r>
+                        <a:rPr lang="en-GB" b="0" i="1" noProof="0" smtClean="0">
+                          <a:latin typeface="Cambria Math" panose="02040503050406030204" pitchFamily="18" charset="0"/>
+                        </a:rPr>
+                        <m:t>(</m:t>
+                      </m:r>
+                      <m:sSub>
+                        <m:sSubPr>
+                          <m:ctrlPr>
+                            <a:rPr lang="en-GB" i="1">
+                              <a:latin typeface="Cambria Math" panose="02040503050406030204" pitchFamily="18" charset="0"/>
+                              <a:ea typeface="Cambria Math" panose="02040503050406030204" pitchFamily="18" charset="0"/>
+                            </a:rPr>
+                          </m:ctrlPr>
+                        </m:sSubPr>
+                        <m:e>
+                          <m:r>
+                            <a:rPr lang="en-GB" i="1">
+                              <a:latin typeface="Cambria Math" panose="02040503050406030204" pitchFamily="18" charset="0"/>
+                              <a:ea typeface="Cambria Math" panose="02040503050406030204" pitchFamily="18" charset="0"/>
+                            </a:rPr>
+                            <m:t>𝜉</m:t>
+                          </m:r>
+                        </m:e>
+                        <m:sub>
+                          <m:r>
+                            <a:rPr lang="en-GB" b="0" i="1" smtClean="0">
+                              <a:latin typeface="Cambria Math" panose="02040503050406030204" pitchFamily="18" charset="0"/>
+                              <a:ea typeface="Cambria Math" panose="02040503050406030204" pitchFamily="18" charset="0"/>
+                            </a:rPr>
+                            <m:t>𝑖</m:t>
+                          </m:r>
+                          <m:r>
+                            <a:rPr lang="en-GB" i="1">
+                              <a:latin typeface="Cambria Math" panose="02040503050406030204" pitchFamily="18" charset="0"/>
+                              <a:ea typeface="Cambria Math" panose="02040503050406030204" pitchFamily="18" charset="0"/>
+                            </a:rPr>
+                            <m:t>,</m:t>
+                          </m:r>
+                          <m:r>
+                            <a:rPr lang="en-GB" i="1">
+                              <a:latin typeface="Cambria Math" panose="02040503050406030204" pitchFamily="18" charset="0"/>
+                              <a:ea typeface="Cambria Math" panose="02040503050406030204" pitchFamily="18" charset="0"/>
+                            </a:rPr>
+                            <m:t>𝑡</m:t>
+                          </m:r>
+                        </m:sub>
+                      </m:sSub>
+                      <m:r>
+                        <a:rPr lang="en-GB" b="0" i="1" noProof="0" smtClean="0">
+                          <a:latin typeface="Cambria Math" panose="02040503050406030204" pitchFamily="18" charset="0"/>
+                        </a:rPr>
+                        <m:t>)</m:t>
+                      </m:r>
+                    </m:oMath>
+                  </m:oMathPara>
+                </a14:m>
+                <a:endParaRPr lang="en-US" dirty="0"/>
+              </a:p>
+            </p:txBody>
+          </p:sp>
+        </mc:Choice>
+        <mc:Fallback>
+          <p:sp>
+            <p:nvSpPr>
+              <p:cNvPr id="49" name="TextBox 48">
+                <a:extLst>
+                  <a:ext uri="{FF2B5EF4-FFF2-40B4-BE49-F238E27FC236}">
+                    <a16:creationId xmlns:a16="http://schemas.microsoft.com/office/drawing/2014/main" id="{D8A5B424-6BC4-F711-7ADD-6CFD1A8F11C0}"/>
+                  </a:ext>
+                </a:extLst>
+              </p:cNvPr>
+              <p:cNvSpPr txBox="1">
+                <a:spLocks noRot="1" noChangeAspect="1" noMove="1" noResize="1" noEditPoints="1" noAdjustHandles="1" noChangeArrowheads="1" noChangeShapeType="1" noTextEdit="1"/>
+              </p:cNvSpPr>
+              <p:nvPr/>
+            </p:nvSpPr>
+            <p:spPr>
+              <a:xfrm>
+                <a:off x="3187516" y="2610447"/>
+                <a:ext cx="802419" cy="381515"/>
+              </a:xfrm>
+              <a:prstGeom prst="rect">
+                <a:avLst/>
+              </a:prstGeom>
+              <a:blipFill>
+                <a:blip r:embed="rId4"/>
+                <a:stretch>
+                  <a:fillRect r="-16418" b="-9231"/>
+                </a:stretch>
+              </a:blipFill>
+              <a:ln>
+                <a:solidFill>
+                  <a:schemeClr val="tx1"/>
+                </a:solidFill>
+              </a:ln>
+            </p:spPr>
+            <p:txBody>
+              <a:bodyPr/>
+              <a:lstStyle/>
+              <a:p>
+                <a:r>
+                  <a:rPr lang="en-US">
+                    <a:noFill/>
+                  </a:rPr>
+                  <a:t> </a:t>
+                </a:r>
+              </a:p>
+            </p:txBody>
+          </p:sp>
+        </mc:Fallback>
+      </mc:AlternateContent>
+      <p:sp>
+        <p:nvSpPr>
+          <p:cNvPr id="50" name="Right Brace 49">
+            <a:extLst>
+              <a:ext uri="{FF2B5EF4-FFF2-40B4-BE49-F238E27FC236}">
+                <a16:creationId xmlns:a16="http://schemas.microsoft.com/office/drawing/2014/main" id="{2E5B0991-33D7-BBE0-9784-53FC4D19336C}"/>
+              </a:ext>
+            </a:extLst>
+          </p:cNvPr>
+          <p:cNvSpPr/>
+          <p:nvPr/>
+        </p:nvSpPr>
+        <p:spPr>
+          <a:xfrm rot="5400000">
+            <a:off x="573769" y="804679"/>
+            <a:ext cx="279607" cy="995083"/>
+          </a:xfrm>
+          <a:prstGeom prst="rightBrace">
+            <a:avLst>
+              <a:gd name="adj1" fmla="val 21960"/>
+              <a:gd name="adj2" fmla="val 50000"/>
+            </a:avLst>
+          </a:prstGeom>
+          <a:ln w="12700"/>
+        </p:spPr>
+        <p:style>
+          <a:lnRef idx="1">
+            <a:schemeClr val="accent1"/>
+          </a:lnRef>
+          <a:fillRef idx="0">
+            <a:schemeClr val="accent1"/>
+          </a:fillRef>
+          <a:effectRef idx="0">
+            <a:schemeClr val="accent1"/>
+          </a:effectRef>
+          <a:fontRef idx="minor">
+            <a:schemeClr val="tx1"/>
+          </a:fontRef>
+        </p:style>
+        <p:txBody>
+          <a:bodyPr rtlCol="0" anchor="ctr"/>
+          <a:lstStyle/>
+          <a:p>
+            <a:pPr algn="ctr"/>
+            <a:endParaRPr lang="en-US"/>
+          </a:p>
+        </p:txBody>
+      </p:sp>
+      <p:sp>
+        <p:nvSpPr>
+          <p:cNvPr id="51" name="TextBox 50">
+            <a:extLst>
+              <a:ext uri="{FF2B5EF4-FFF2-40B4-BE49-F238E27FC236}">
+                <a16:creationId xmlns:a16="http://schemas.microsoft.com/office/drawing/2014/main" id="{471169A9-A55F-9115-F384-8ADE7B9A44DA}"/>
+              </a:ext>
+            </a:extLst>
+          </p:cNvPr>
+          <p:cNvSpPr txBox="1"/>
+          <p:nvPr/>
+        </p:nvSpPr>
+        <p:spPr>
+          <a:xfrm>
+            <a:off x="1844740" y="2892287"/>
+            <a:ext cx="987233" cy="646331"/>
+          </a:xfrm>
+          <a:prstGeom prst="rect">
+            <a:avLst/>
+          </a:prstGeom>
+          <a:noFill/>
+        </p:spPr>
+        <p:txBody>
+          <a:bodyPr wrap="square">
+            <a:spAutoFit/>
+          </a:bodyPr>
+          <a:lstStyle/>
+          <a:p>
+            <a:pPr algn="ctr"/>
+            <a:r>
+              <a:rPr lang="en-GB" sz="1800" b="0" strike="noStrike" spc="-1" noProof="0" dirty="0">
+                <a:solidFill>
+                  <a:srgbClr val="000000"/>
+                </a:solidFill>
+                <a:latin typeface="Calibri"/>
+              </a:rPr>
+              <a:t>Optimal</a:t>
+            </a:r>
+          </a:p>
+          <a:p>
+            <a:pPr algn="ctr"/>
+            <a:r>
+              <a:rPr lang="en-GB" spc="-1" dirty="0">
+                <a:solidFill>
+                  <a:srgbClr val="000000"/>
+                </a:solidFill>
+                <a:latin typeface="Calibri"/>
+              </a:rPr>
+              <a:t>Policy</a:t>
+            </a:r>
+            <a:endParaRPr lang="en-GB" noProof="0" dirty="0"/>
+          </a:p>
+        </p:txBody>
+      </p:sp>
+      <p:cxnSp>
+        <p:nvCxnSpPr>
+          <p:cNvPr id="52" name="Connector: Elbow 51">
+            <a:extLst>
+              <a:ext uri="{FF2B5EF4-FFF2-40B4-BE49-F238E27FC236}">
+                <a16:creationId xmlns:a16="http://schemas.microsoft.com/office/drawing/2014/main" id="{4F32D2BF-5934-E521-F476-96FD53D6036E}"/>
+              </a:ext>
+            </a:extLst>
+          </p:cNvPr>
+          <p:cNvCxnSpPr>
+            <a:cxnSpLocks/>
+          </p:cNvCxnSpPr>
+          <p:nvPr/>
+        </p:nvCxnSpPr>
+        <p:spPr>
+          <a:xfrm rot="16200000" flipH="1">
+            <a:off x="624655" y="1917788"/>
+            <a:ext cx="1672162" cy="754374"/>
+          </a:xfrm>
+          <a:prstGeom prst="bentConnector2">
+            <a:avLst/>
+          </a:prstGeom>
+          <a:ln w="19050">
+            <a:solidFill>
+              <a:schemeClr val="tx1"/>
+            </a:solidFill>
+            <a:prstDash val="dash"/>
+            <a:tailEnd type="triangle" w="med" len="lg"/>
+          </a:ln>
+        </p:spPr>
+        <p:style>
+          <a:lnRef idx="1">
+            <a:schemeClr val="accent1"/>
+          </a:lnRef>
+          <a:fillRef idx="0">
+            <a:schemeClr val="accent1"/>
+          </a:fillRef>
+          <a:effectRef idx="0">
+            <a:schemeClr val="accent1"/>
+          </a:effectRef>
+          <a:fontRef idx="minor">
+            <a:schemeClr val="tx1"/>
+          </a:fontRef>
+        </p:style>
+      </p:cxnSp>
+      <p:cxnSp>
+        <p:nvCxnSpPr>
+          <p:cNvPr id="53" name="Connector: Elbow 52">
+            <a:extLst>
+              <a:ext uri="{FF2B5EF4-FFF2-40B4-BE49-F238E27FC236}">
+                <a16:creationId xmlns:a16="http://schemas.microsoft.com/office/drawing/2014/main" id="{6E0ECED2-E461-D3D4-F6A8-FA24A36E1B34}"/>
+              </a:ext>
+            </a:extLst>
+          </p:cNvPr>
+          <p:cNvCxnSpPr>
+            <a:cxnSpLocks/>
+          </p:cNvCxnSpPr>
+          <p:nvPr/>
+        </p:nvCxnSpPr>
+        <p:spPr>
+          <a:xfrm rot="16200000" flipH="1">
+            <a:off x="175192" y="1706053"/>
+            <a:ext cx="1822544" cy="1447535"/>
+          </a:xfrm>
+          <a:prstGeom prst="bentConnector3">
+            <a:avLst>
+              <a:gd name="adj1" fmla="val 100172"/>
+            </a:avLst>
+          </a:prstGeom>
+          <a:ln w="19050">
+            <a:solidFill>
+              <a:schemeClr val="tx1"/>
+            </a:solidFill>
+            <a:prstDash val="dash"/>
+            <a:tailEnd type="triangle" w="med" len="lg"/>
+          </a:ln>
+        </p:spPr>
+        <p:style>
+          <a:lnRef idx="1">
+            <a:schemeClr val="accent1"/>
+          </a:lnRef>
+          <a:fillRef idx="0">
+            <a:schemeClr val="accent1"/>
+          </a:fillRef>
+          <a:effectRef idx="0">
+            <a:schemeClr val="accent1"/>
+          </a:effectRef>
+          <a:fontRef idx="minor">
+            <a:schemeClr val="tx1"/>
+          </a:fontRef>
+        </p:style>
+      </p:cxnSp>
+      <mc:AlternateContent xmlns:mc="http://schemas.openxmlformats.org/markup-compatibility/2006">
+        <mc:Choice xmlns:a14="http://schemas.microsoft.com/office/drawing/2010/main" Requires="a14">
+          <p:sp>
+            <p:nvSpPr>
+              <p:cNvPr id="54" name="TextBox 53">
+                <a:extLst>
+                  <a:ext uri="{FF2B5EF4-FFF2-40B4-BE49-F238E27FC236}">
+                    <a16:creationId xmlns:a16="http://schemas.microsoft.com/office/drawing/2014/main" id="{C7BB4C30-F421-A95D-79CE-BC4A4FA9BB49}"/>
+                  </a:ext>
+                </a:extLst>
+              </p:cNvPr>
+              <p:cNvSpPr txBox="1"/>
+              <p:nvPr/>
+            </p:nvSpPr>
+            <p:spPr>
+              <a:xfrm>
+                <a:off x="84794" y="1574335"/>
+                <a:ext cx="508793" cy="369332"/>
+              </a:xfrm>
+              <a:prstGeom prst="rect">
+                <a:avLst/>
+              </a:prstGeom>
+              <a:solidFill>
+                <a:schemeClr val="bg1">
+                  <a:alpha val="85000"/>
+                </a:schemeClr>
+              </a:solidFill>
+              <a:ln>
+                <a:solidFill>
+                  <a:schemeClr val="tx1"/>
+                </a:solidFill>
+              </a:ln>
+            </p:spPr>
+            <p:txBody>
+              <a:bodyPr wrap="none" rtlCol="0">
+                <a:spAutoFit/>
+              </a:bodyPr>
+              <a:lstStyle/>
+              <a:p>
+                <a:pPr/>
+                <a14:m>
+                  <m:oMathPara xmlns:m="http://schemas.openxmlformats.org/officeDocument/2006/math">
+                    <m:oMathParaPr>
+                      <m:jc m:val="centerGroup"/>
+                    </m:oMathParaPr>
+                    <m:oMath xmlns:m="http://schemas.openxmlformats.org/officeDocument/2006/math">
+                      <m:sSub>
+                        <m:sSubPr>
+                          <m:ctrlPr>
+                            <a:rPr lang="en-GB" i="1" smtClean="0">
+                              <a:latin typeface="Cambria Math" panose="02040503050406030204" pitchFamily="18" charset="0"/>
+                            </a:rPr>
+                          </m:ctrlPr>
+                        </m:sSubPr>
+                        <m:e>
+                          <m:r>
+                            <a:rPr lang="de-DE" b="0" i="1" smtClean="0">
+                              <a:latin typeface="Cambria Math" panose="02040503050406030204" pitchFamily="18" charset="0"/>
+                            </a:rPr>
+                            <m:t>𝑄</m:t>
+                          </m:r>
+                        </m:e>
+                        <m:sub>
+                          <m:r>
+                            <a:rPr lang="de-DE" b="0" i="1" smtClean="0">
+                              <a:latin typeface="Cambria Math" panose="02040503050406030204" pitchFamily="18" charset="0"/>
+                            </a:rPr>
+                            <m:t>1</m:t>
+                          </m:r>
+                        </m:sub>
+                      </m:sSub>
+                    </m:oMath>
+                  </m:oMathPara>
+                </a14:m>
+                <a:endParaRPr lang="en-GB" dirty="0"/>
+              </a:p>
+            </p:txBody>
+          </p:sp>
+        </mc:Choice>
+        <mc:Fallback>
+          <p:sp>
+            <p:nvSpPr>
+              <p:cNvPr id="54" name="TextBox 53">
+                <a:extLst>
+                  <a:ext uri="{FF2B5EF4-FFF2-40B4-BE49-F238E27FC236}">
+                    <a16:creationId xmlns:a16="http://schemas.microsoft.com/office/drawing/2014/main" id="{C7BB4C30-F421-A95D-79CE-BC4A4FA9BB49}"/>
+                  </a:ext>
+                </a:extLst>
+              </p:cNvPr>
+              <p:cNvSpPr txBox="1">
+                <a:spLocks noRot="1" noChangeAspect="1" noMove="1" noResize="1" noEditPoints="1" noAdjustHandles="1" noChangeArrowheads="1" noChangeShapeType="1" noTextEdit="1"/>
+              </p:cNvSpPr>
+              <p:nvPr/>
+            </p:nvSpPr>
+            <p:spPr>
+              <a:xfrm>
+                <a:off x="84794" y="1574335"/>
+                <a:ext cx="508793" cy="369332"/>
+              </a:xfrm>
+              <a:prstGeom prst="rect">
+                <a:avLst/>
+              </a:prstGeom>
+              <a:blipFill>
+                <a:blip r:embed="rId5"/>
+                <a:stretch>
+                  <a:fillRect b="-7937"/>
+                </a:stretch>
+              </a:blipFill>
+              <a:ln>
+                <a:solidFill>
+                  <a:schemeClr val="tx1"/>
+                </a:solidFill>
+              </a:ln>
+            </p:spPr>
+            <p:txBody>
+              <a:bodyPr/>
+              <a:lstStyle/>
+              <a:p>
+                <a:r>
+                  <a:rPr lang="en-US">
+                    <a:noFill/>
+                  </a:rPr>
+                  <a:t> </a:t>
+                </a:r>
+              </a:p>
+            </p:txBody>
+          </p:sp>
+        </mc:Fallback>
+      </mc:AlternateContent>
+      <mc:AlternateContent xmlns:mc="http://schemas.openxmlformats.org/markup-compatibility/2006">
+        <mc:Choice xmlns:a14="http://schemas.microsoft.com/office/drawing/2010/main" Requires="a14">
+          <p:sp>
+            <p:nvSpPr>
+              <p:cNvPr id="55" name="TextBox 54">
+                <a:extLst>
+                  <a:ext uri="{FF2B5EF4-FFF2-40B4-BE49-F238E27FC236}">
+                    <a16:creationId xmlns:a16="http://schemas.microsoft.com/office/drawing/2014/main" id="{3289A6B0-67D9-5952-9231-51DE16A5AB4D}"/>
+                  </a:ext>
+                </a:extLst>
+              </p:cNvPr>
+              <p:cNvSpPr txBox="1"/>
+              <p:nvPr/>
+            </p:nvSpPr>
+            <p:spPr>
+              <a:xfrm>
+                <a:off x="843644" y="2128209"/>
+                <a:ext cx="518411" cy="369332"/>
+              </a:xfrm>
+              <a:prstGeom prst="rect">
+                <a:avLst/>
+              </a:prstGeom>
+              <a:solidFill>
+                <a:schemeClr val="bg1">
+                  <a:alpha val="85000"/>
+                </a:schemeClr>
+              </a:solidFill>
+              <a:ln>
+                <a:solidFill>
+                  <a:schemeClr val="tx1"/>
+                </a:solidFill>
+              </a:ln>
+            </p:spPr>
+            <p:txBody>
+              <a:bodyPr wrap="none" rtlCol="0">
+                <a:spAutoFit/>
+              </a:bodyPr>
+              <a:lstStyle/>
+              <a:p>
+                <a:pPr/>
+                <a14:m>
+                  <m:oMathPara xmlns:m="http://schemas.openxmlformats.org/officeDocument/2006/math">
+                    <m:oMathParaPr>
+                      <m:jc m:val="centerGroup"/>
+                    </m:oMathParaPr>
+                    <m:oMath xmlns:m="http://schemas.openxmlformats.org/officeDocument/2006/math">
+                      <m:sSub>
+                        <m:sSubPr>
+                          <m:ctrlPr>
+                            <a:rPr lang="en-GB" i="1" smtClean="0">
+                              <a:latin typeface="Cambria Math" panose="02040503050406030204" pitchFamily="18" charset="0"/>
+                            </a:rPr>
+                          </m:ctrlPr>
+                        </m:sSubPr>
+                        <m:e>
+                          <m:r>
+                            <a:rPr lang="de-DE" b="0" i="1" smtClean="0">
+                              <a:latin typeface="Cambria Math" panose="02040503050406030204" pitchFamily="18" charset="0"/>
+                            </a:rPr>
+                            <m:t>𝑄</m:t>
+                          </m:r>
+                        </m:e>
+                        <m:sub>
+                          <m:r>
+                            <a:rPr lang="de-DE" b="0" i="1" smtClean="0">
+                              <a:latin typeface="Cambria Math" panose="02040503050406030204" pitchFamily="18" charset="0"/>
+                            </a:rPr>
+                            <m:t>𝑛</m:t>
+                          </m:r>
+                        </m:sub>
+                      </m:sSub>
+                    </m:oMath>
+                  </m:oMathPara>
+                </a14:m>
+                <a:endParaRPr lang="en-GB" dirty="0"/>
+              </a:p>
+            </p:txBody>
+          </p:sp>
+        </mc:Choice>
+        <mc:Fallback>
+          <p:sp>
+            <p:nvSpPr>
+              <p:cNvPr id="55" name="TextBox 54">
+                <a:extLst>
+                  <a:ext uri="{FF2B5EF4-FFF2-40B4-BE49-F238E27FC236}">
+                    <a16:creationId xmlns:a16="http://schemas.microsoft.com/office/drawing/2014/main" id="{3289A6B0-67D9-5952-9231-51DE16A5AB4D}"/>
+                  </a:ext>
+                </a:extLst>
+              </p:cNvPr>
+              <p:cNvSpPr txBox="1">
+                <a:spLocks noRot="1" noChangeAspect="1" noMove="1" noResize="1" noEditPoints="1" noAdjustHandles="1" noChangeArrowheads="1" noChangeShapeType="1" noTextEdit="1"/>
+              </p:cNvSpPr>
+              <p:nvPr/>
+            </p:nvSpPr>
+            <p:spPr>
+              <a:xfrm>
+                <a:off x="843644" y="2128209"/>
+                <a:ext cx="518411" cy="369332"/>
+              </a:xfrm>
+              <a:prstGeom prst="rect">
+                <a:avLst/>
+              </a:prstGeom>
+              <a:blipFill>
+                <a:blip r:embed="rId6"/>
+                <a:stretch>
+                  <a:fillRect b="-7937"/>
+                </a:stretch>
+              </a:blipFill>
+              <a:ln>
+                <a:solidFill>
+                  <a:schemeClr val="tx1"/>
+                </a:solidFill>
+              </a:ln>
+            </p:spPr>
+            <p:txBody>
+              <a:bodyPr/>
+              <a:lstStyle/>
+              <a:p>
+                <a:r>
+                  <a:rPr lang="en-US">
+                    <a:noFill/>
+                  </a:rPr>
+                  <a:t> </a:t>
+                </a:r>
+              </a:p>
+            </p:txBody>
+          </p:sp>
+        </mc:Fallback>
+      </mc:AlternateContent>
+      <mc:AlternateContent xmlns:mc="http://schemas.openxmlformats.org/markup-compatibility/2006">
+        <mc:Choice xmlns:a14="http://schemas.microsoft.com/office/drawing/2010/main" Requires="a14">
+          <p:sp>
+            <p:nvSpPr>
+              <p:cNvPr id="56" name="TextBox 55">
+                <a:extLst>
+                  <a:ext uri="{FF2B5EF4-FFF2-40B4-BE49-F238E27FC236}">
+                    <a16:creationId xmlns:a16="http://schemas.microsoft.com/office/drawing/2014/main" id="{46BA894D-980F-717A-AEB0-C34F175803D7}"/>
+                  </a:ext>
+                </a:extLst>
+              </p:cNvPr>
+              <p:cNvSpPr txBox="1"/>
+              <p:nvPr/>
+            </p:nvSpPr>
+            <p:spPr>
+              <a:xfrm>
+                <a:off x="410508" y="2068720"/>
+                <a:ext cx="381730" cy="369332"/>
+              </a:xfrm>
+              <a:prstGeom prst="rect">
+                <a:avLst/>
+              </a:prstGeom>
+              <a:noFill/>
+            </p:spPr>
+            <p:txBody>
+              <a:bodyPr wrap="square">
+                <a:spAutoFit/>
+              </a:bodyPr>
+              <a:lstStyle/>
+              <a:p>
+                <a:pPr/>
+                <a14:m>
+                  <m:oMathPara xmlns:m="http://schemas.openxmlformats.org/officeDocument/2006/math">
+                    <m:oMathParaPr>
+                      <m:jc m:val="centerGroup"/>
+                    </m:oMathParaPr>
+                    <m:oMath xmlns:m="http://schemas.openxmlformats.org/officeDocument/2006/math">
+                      <m:r>
+                        <a:rPr lang="en-GB" b="0" i="1" noProof="0" smtClean="0">
+                          <a:latin typeface="Cambria Math" panose="02040503050406030204" pitchFamily="18" charset="0"/>
+                          <a:ea typeface="Cambria Math" panose="02040503050406030204" pitchFamily="18" charset="0"/>
+                        </a:rPr>
+                        <m:t>⋯</m:t>
+                      </m:r>
+                    </m:oMath>
+                  </m:oMathPara>
+                </a14:m>
+                <a:endParaRPr lang="en-GB" noProof="0" dirty="0"/>
+              </a:p>
+            </p:txBody>
+          </p:sp>
+        </mc:Choice>
+        <mc:Fallback>
+          <p:sp>
+            <p:nvSpPr>
+              <p:cNvPr id="56" name="TextBox 55">
+                <a:extLst>
+                  <a:ext uri="{FF2B5EF4-FFF2-40B4-BE49-F238E27FC236}">
+                    <a16:creationId xmlns:a16="http://schemas.microsoft.com/office/drawing/2014/main" id="{46BA894D-980F-717A-AEB0-C34F175803D7}"/>
+                  </a:ext>
+                </a:extLst>
+              </p:cNvPr>
+              <p:cNvSpPr txBox="1">
+                <a:spLocks noRot="1" noChangeAspect="1" noMove="1" noResize="1" noEditPoints="1" noAdjustHandles="1" noChangeArrowheads="1" noChangeShapeType="1" noTextEdit="1"/>
+              </p:cNvSpPr>
+              <p:nvPr/>
+            </p:nvSpPr>
+            <p:spPr>
+              <a:xfrm>
+                <a:off x="410508" y="2068720"/>
+                <a:ext cx="381730" cy="369332"/>
+              </a:xfrm>
+              <a:prstGeom prst="rect">
+                <a:avLst/>
+              </a:prstGeom>
+              <a:blipFill>
+                <a:blip r:embed="rId7"/>
+                <a:stretch>
+                  <a:fillRect/>
+                </a:stretch>
+              </a:blipFill>
+            </p:spPr>
+            <p:txBody>
+              <a:bodyPr/>
+              <a:lstStyle/>
+              <a:p>
+                <a:r>
+                  <a:rPr lang="en-US">
+                    <a:noFill/>
+                  </a:rPr>
+                  <a:t> </a:t>
+                </a:r>
+              </a:p>
+            </p:txBody>
+          </p:sp>
+        </mc:Fallback>
+      </mc:AlternateContent>
+      <p:grpSp>
+        <p:nvGrpSpPr>
+          <p:cNvPr id="57" name="Group 56">
+            <a:extLst>
+              <a:ext uri="{FF2B5EF4-FFF2-40B4-BE49-F238E27FC236}">
+                <a16:creationId xmlns:a16="http://schemas.microsoft.com/office/drawing/2014/main" id="{919686DF-F306-C598-EFA3-D6975CEB9938}"/>
+              </a:ext>
+            </a:extLst>
+          </p:cNvPr>
+          <p:cNvGrpSpPr>
+            <a:grpSpLocks noChangeAspect="1"/>
+          </p:cNvGrpSpPr>
+          <p:nvPr/>
+        </p:nvGrpSpPr>
+        <p:grpSpPr>
+          <a:xfrm>
+            <a:off x="4644689" y="2438052"/>
+            <a:ext cx="825868" cy="827381"/>
+            <a:chOff x="3837320" y="2577311"/>
+            <a:chExt cx="1214148" cy="1216373"/>
+          </a:xfrm>
+        </p:grpSpPr>
+        <p:sp>
+          <p:nvSpPr>
+            <p:cNvPr id="58" name="Oval 57">
+              <a:extLst>
+                <a:ext uri="{FF2B5EF4-FFF2-40B4-BE49-F238E27FC236}">
+                  <a16:creationId xmlns:a16="http://schemas.microsoft.com/office/drawing/2014/main" id="{70A5AB4A-20F7-0ADC-B56A-1B97ADB139FE}"/>
+                </a:ext>
+              </a:extLst>
+            </p:cNvPr>
+            <p:cNvSpPr/>
+            <p:nvPr/>
+          </p:nvSpPr>
+          <p:spPr>
+            <a:xfrm>
+              <a:off x="3837320" y="3466506"/>
+              <a:ext cx="1214148" cy="327178"/>
+            </a:xfrm>
+            <a:prstGeom prst="ellipse">
+              <a:avLst/>
+            </a:prstGeom>
+            <a:solidFill>
+              <a:srgbClr val="FFE6CB"/>
+            </a:solidFill>
+            <a:ln>
+              <a:solidFill>
+                <a:schemeClr val="accent1">
+                  <a:shade val="15000"/>
+                </a:schemeClr>
+              </a:solidFill>
+            </a:ln>
+          </p:spPr>
+          <p:style>
+            <a:lnRef idx="2">
+              <a:schemeClr val="accent1">
+                <a:shade val="15000"/>
+              </a:schemeClr>
+            </a:lnRef>
+            <a:fillRef idx="1">
+              <a:schemeClr val="accent1"/>
+            </a:fillRef>
+            <a:effectRef idx="0">
+              <a:schemeClr val="accent1"/>
+            </a:effectRef>
+            <a:fontRef idx="minor">
+              <a:schemeClr val="lt1"/>
+            </a:fontRef>
+          </p:style>
+          <p:txBody>
+            <a:bodyPr rtlCol="0" anchor="ctr"/>
+            <a:lstStyle/>
+            <a:p>
+              <a:pPr algn="ctr"/>
+              <a:endParaRPr lang="en-GB" noProof="0" dirty="0"/>
+            </a:p>
+          </p:txBody>
+        </p:sp>
+        <p:grpSp>
+          <p:nvGrpSpPr>
+            <p:cNvPr id="59" name="Group 58">
+              <a:extLst>
+                <a:ext uri="{FF2B5EF4-FFF2-40B4-BE49-F238E27FC236}">
+                  <a16:creationId xmlns:a16="http://schemas.microsoft.com/office/drawing/2014/main" id="{B6C18F64-1BCF-2DB3-739C-7C9155CE9495}"/>
+                </a:ext>
+              </a:extLst>
+            </p:cNvPr>
+            <p:cNvGrpSpPr>
+              <a:grpSpLocks noChangeAspect="1"/>
+            </p:cNvGrpSpPr>
+            <p:nvPr/>
+          </p:nvGrpSpPr>
+          <p:grpSpPr>
+            <a:xfrm>
+              <a:off x="4053780" y="2949988"/>
+              <a:ext cx="804417" cy="713070"/>
+              <a:chOff x="1758028" y="3687481"/>
+              <a:chExt cx="1312148" cy="1163145"/>
+            </a:xfrm>
+          </p:grpSpPr>
+          <p:grpSp>
+            <p:nvGrpSpPr>
+              <p:cNvPr id="61" name="Group 60">
+                <a:extLst>
+                  <a:ext uri="{FF2B5EF4-FFF2-40B4-BE49-F238E27FC236}">
+                    <a16:creationId xmlns:a16="http://schemas.microsoft.com/office/drawing/2014/main" id="{AAAEC6A1-E049-8E16-3401-510A4F90F235}"/>
+                  </a:ext>
+                </a:extLst>
+              </p:cNvPr>
+              <p:cNvGrpSpPr/>
+              <p:nvPr/>
+            </p:nvGrpSpPr>
+            <p:grpSpPr>
+              <a:xfrm>
+                <a:off x="2615571" y="4393426"/>
+                <a:ext cx="454605" cy="457200"/>
+                <a:chOff x="2615571" y="4393426"/>
+                <a:chExt cx="454605" cy="457200"/>
+              </a:xfrm>
+            </p:grpSpPr>
+            <p:sp>
+              <p:nvSpPr>
+                <p:cNvPr id="82" name="Oval 81">
+                  <a:extLst>
+                    <a:ext uri="{FF2B5EF4-FFF2-40B4-BE49-F238E27FC236}">
+                      <a16:creationId xmlns:a16="http://schemas.microsoft.com/office/drawing/2014/main" id="{89EB9CFA-8367-1B01-A42C-D712C7A482C0}"/>
+                    </a:ext>
+                  </a:extLst>
+                </p:cNvPr>
+                <p:cNvSpPr/>
+                <p:nvPr/>
+              </p:nvSpPr>
+              <p:spPr>
+                <a:xfrm>
+                  <a:off x="2615571" y="4393426"/>
+                  <a:ext cx="454605" cy="457200"/>
+                </a:xfrm>
+                <a:prstGeom prst="ellipse">
+                  <a:avLst/>
+                </a:prstGeom>
+                <a:noFill/>
+                <a:ln w="25400"/>
+              </p:spPr>
+              <p:style>
+                <a:lnRef idx="2">
+                  <a:schemeClr val="accent1">
+                    <a:shade val="15000"/>
+                  </a:schemeClr>
+                </a:lnRef>
+                <a:fillRef idx="1">
+                  <a:schemeClr val="accent1"/>
+                </a:fillRef>
+                <a:effectRef idx="0">
+                  <a:schemeClr val="accent1"/>
+                </a:effectRef>
+                <a:fontRef idx="minor">
+                  <a:schemeClr val="lt1"/>
+                </a:fontRef>
+              </p:style>
+              <p:txBody>
+                <a:bodyPr rtlCol="0" anchor="ctr"/>
+                <a:lstStyle/>
+                <a:p>
+                  <a:pPr algn="ctr"/>
+                  <a:endParaRPr lang="en-US"/>
+                </a:p>
+              </p:txBody>
+            </p:sp>
+            <p:sp>
+              <p:nvSpPr>
+                <p:cNvPr id="83" name="Oval 82">
+                  <a:extLst>
+                    <a:ext uri="{FF2B5EF4-FFF2-40B4-BE49-F238E27FC236}">
+                      <a16:creationId xmlns:a16="http://schemas.microsoft.com/office/drawing/2014/main" id="{86918090-1BD7-802E-9533-069DAACC94C2}"/>
+                    </a:ext>
+                  </a:extLst>
+                </p:cNvPr>
+                <p:cNvSpPr>
+                  <a:spLocks noChangeAspect="1"/>
+                </p:cNvSpPr>
+                <p:nvPr/>
+              </p:nvSpPr>
+              <p:spPr>
+                <a:xfrm>
+                  <a:off x="2776764" y="4563411"/>
+                  <a:ext cx="124523" cy="125233"/>
+                </a:xfrm>
+                <a:prstGeom prst="ellipse">
+                  <a:avLst/>
+                </a:prstGeom>
+                <a:noFill/>
+                <a:ln w="25400"/>
+              </p:spPr>
+              <p:style>
+                <a:lnRef idx="2">
+                  <a:schemeClr val="accent1">
+                    <a:shade val="15000"/>
+                  </a:schemeClr>
+                </a:lnRef>
+                <a:fillRef idx="1">
+                  <a:schemeClr val="accent1"/>
+                </a:fillRef>
+                <a:effectRef idx="0">
+                  <a:schemeClr val="accent1"/>
+                </a:effectRef>
+                <a:fontRef idx="minor">
+                  <a:schemeClr val="lt1"/>
+                </a:fontRef>
+              </p:style>
+              <p:txBody>
+                <a:bodyPr rtlCol="0" anchor="ctr"/>
+                <a:lstStyle/>
+                <a:p>
+                  <a:pPr algn="ctr"/>
+                  <a:endParaRPr lang="en-US" dirty="0"/>
+                </a:p>
+              </p:txBody>
+            </p:sp>
+          </p:grpSp>
+          <p:grpSp>
+            <p:nvGrpSpPr>
+              <p:cNvPr id="62" name="Group 61">
+                <a:extLst>
+                  <a:ext uri="{FF2B5EF4-FFF2-40B4-BE49-F238E27FC236}">
+                    <a16:creationId xmlns:a16="http://schemas.microsoft.com/office/drawing/2014/main" id="{562BB03A-C05B-BC92-BCFD-D04F33F5CA48}"/>
+                  </a:ext>
+                </a:extLst>
+              </p:cNvPr>
+              <p:cNvGrpSpPr/>
+              <p:nvPr/>
+            </p:nvGrpSpPr>
+            <p:grpSpPr>
+              <a:xfrm>
+                <a:off x="1758028" y="4383486"/>
+                <a:ext cx="454605" cy="457200"/>
+                <a:chOff x="2615571" y="4393426"/>
+                <a:chExt cx="454605" cy="457200"/>
+              </a:xfrm>
+            </p:grpSpPr>
+            <p:sp>
+              <p:nvSpPr>
+                <p:cNvPr id="80" name="Oval 79">
+                  <a:extLst>
+                    <a:ext uri="{FF2B5EF4-FFF2-40B4-BE49-F238E27FC236}">
+                      <a16:creationId xmlns:a16="http://schemas.microsoft.com/office/drawing/2014/main" id="{4EC06E0D-59EE-806D-86CF-2FF20BE0B17E}"/>
+                    </a:ext>
+                  </a:extLst>
+                </p:cNvPr>
+                <p:cNvSpPr/>
+                <p:nvPr/>
+              </p:nvSpPr>
+              <p:spPr>
+                <a:xfrm>
+                  <a:off x="2615571" y="4393426"/>
+                  <a:ext cx="454605" cy="457200"/>
+                </a:xfrm>
+                <a:prstGeom prst="ellipse">
+                  <a:avLst/>
+                </a:prstGeom>
+                <a:noFill/>
+                <a:ln w="25400"/>
+              </p:spPr>
+              <p:style>
+                <a:lnRef idx="2">
+                  <a:schemeClr val="accent1">
+                    <a:shade val="15000"/>
+                  </a:schemeClr>
+                </a:lnRef>
+                <a:fillRef idx="1">
+                  <a:schemeClr val="accent1"/>
+                </a:fillRef>
+                <a:effectRef idx="0">
+                  <a:schemeClr val="accent1"/>
+                </a:effectRef>
+                <a:fontRef idx="minor">
+                  <a:schemeClr val="lt1"/>
+                </a:fontRef>
+              </p:style>
+              <p:txBody>
+                <a:bodyPr rtlCol="0" anchor="ctr"/>
+                <a:lstStyle/>
+                <a:p>
+                  <a:pPr algn="ctr"/>
+                  <a:endParaRPr lang="en-US"/>
+                </a:p>
+              </p:txBody>
+            </p:sp>
+            <p:sp>
+              <p:nvSpPr>
+                <p:cNvPr id="81" name="Oval 80">
+                  <a:extLst>
+                    <a:ext uri="{FF2B5EF4-FFF2-40B4-BE49-F238E27FC236}">
+                      <a16:creationId xmlns:a16="http://schemas.microsoft.com/office/drawing/2014/main" id="{08E36CFC-B317-2773-BB03-6F2C1ADC0A6F}"/>
+                    </a:ext>
+                  </a:extLst>
+                </p:cNvPr>
+                <p:cNvSpPr>
+                  <a:spLocks noChangeAspect="1"/>
+                </p:cNvSpPr>
+                <p:nvPr/>
+              </p:nvSpPr>
+              <p:spPr>
+                <a:xfrm>
+                  <a:off x="2776764" y="4563411"/>
+                  <a:ext cx="124523" cy="125233"/>
+                </a:xfrm>
+                <a:prstGeom prst="ellipse">
+                  <a:avLst/>
+                </a:prstGeom>
+                <a:noFill/>
+                <a:ln w="25400"/>
+              </p:spPr>
+              <p:style>
+                <a:lnRef idx="2">
+                  <a:schemeClr val="accent1">
+                    <a:shade val="15000"/>
+                  </a:schemeClr>
+                </a:lnRef>
+                <a:fillRef idx="1">
+                  <a:schemeClr val="accent1"/>
+                </a:fillRef>
+                <a:effectRef idx="0">
+                  <a:schemeClr val="accent1"/>
+                </a:effectRef>
+                <a:fontRef idx="minor">
+                  <a:schemeClr val="lt1"/>
+                </a:fontRef>
+              </p:style>
+              <p:txBody>
+                <a:bodyPr rtlCol="0" anchor="ctr"/>
+                <a:lstStyle/>
+                <a:p>
+                  <a:pPr algn="ctr"/>
+                  <a:endParaRPr lang="en-US"/>
+                </a:p>
+              </p:txBody>
+            </p:sp>
+          </p:grpSp>
+          <p:cxnSp>
+            <p:nvCxnSpPr>
+              <p:cNvPr id="63" name="Straight Connector 62">
+                <a:extLst>
+                  <a:ext uri="{FF2B5EF4-FFF2-40B4-BE49-F238E27FC236}">
+                    <a16:creationId xmlns:a16="http://schemas.microsoft.com/office/drawing/2014/main" id="{F7D8DDBC-013A-11D8-161B-B7A48DFE4171}"/>
+                  </a:ext>
+                </a:extLst>
+              </p:cNvPr>
+              <p:cNvCxnSpPr>
+                <a:stCxn id="80" idx="6"/>
+                <a:endCxn id="82" idx="2"/>
+              </p:cNvCxnSpPr>
+              <p:nvPr/>
+            </p:nvCxnSpPr>
+            <p:spPr>
+              <a:xfrm>
+                <a:off x="2212633" y="4612086"/>
+                <a:ext cx="402938" cy="9940"/>
+              </a:xfrm>
+              <a:prstGeom prst="line">
+                <a:avLst/>
+              </a:prstGeom>
+              <a:ln w="25400">
+                <a:solidFill>
+                  <a:schemeClr val="tx1"/>
+                </a:solidFill>
+              </a:ln>
+            </p:spPr>
+            <p:style>
+              <a:lnRef idx="1">
+                <a:schemeClr val="accent1"/>
+              </a:lnRef>
+              <a:fillRef idx="0">
+                <a:schemeClr val="accent1"/>
+              </a:fillRef>
+              <a:effectRef idx="0">
+                <a:schemeClr val="accent1"/>
+              </a:effectRef>
+              <a:fontRef idx="minor">
+                <a:schemeClr val="tx1"/>
+              </a:fontRef>
+            </p:style>
+          </p:cxnSp>
+          <p:cxnSp>
+            <p:nvCxnSpPr>
+              <p:cNvPr id="64" name="Straight Connector 63">
+                <a:extLst>
+                  <a:ext uri="{FF2B5EF4-FFF2-40B4-BE49-F238E27FC236}">
+                    <a16:creationId xmlns:a16="http://schemas.microsoft.com/office/drawing/2014/main" id="{004C0F6B-99EF-626D-6065-D0651FC4A79A}"/>
+                  </a:ext>
+                </a:extLst>
+              </p:cNvPr>
+              <p:cNvCxnSpPr>
+                <a:cxnSpLocks/>
+                <a:stCxn id="80" idx="0"/>
+              </p:cNvCxnSpPr>
+              <p:nvPr/>
+            </p:nvCxnSpPr>
+            <p:spPr>
+              <a:xfrm flipV="1">
+                <a:off x="1985331" y="4223565"/>
+                <a:ext cx="0" cy="159921"/>
+              </a:xfrm>
+              <a:prstGeom prst="line">
+                <a:avLst/>
+              </a:prstGeom>
+              <a:ln w="25400">
+                <a:solidFill>
+                  <a:schemeClr val="tx1"/>
+                </a:solidFill>
+              </a:ln>
+            </p:spPr>
+            <p:style>
+              <a:lnRef idx="1">
+                <a:schemeClr val="accent1"/>
+              </a:lnRef>
+              <a:fillRef idx="0">
+                <a:schemeClr val="accent1"/>
+              </a:fillRef>
+              <a:effectRef idx="0">
+                <a:schemeClr val="accent1"/>
+              </a:effectRef>
+              <a:fontRef idx="minor">
+                <a:schemeClr val="tx1"/>
+              </a:fontRef>
+            </p:style>
+          </p:cxnSp>
+          <p:cxnSp>
+            <p:nvCxnSpPr>
+              <p:cNvPr id="65" name="Straight Connector 64">
+                <a:extLst>
+                  <a:ext uri="{FF2B5EF4-FFF2-40B4-BE49-F238E27FC236}">
+                    <a16:creationId xmlns:a16="http://schemas.microsoft.com/office/drawing/2014/main" id="{8EFD251F-7595-A159-C331-07792452F436}"/>
+                  </a:ext>
+                </a:extLst>
+              </p:cNvPr>
+              <p:cNvCxnSpPr>
+                <a:cxnSpLocks/>
+              </p:cNvCxnSpPr>
+              <p:nvPr/>
+            </p:nvCxnSpPr>
+            <p:spPr>
+              <a:xfrm flipV="1">
+                <a:off x="1983863" y="4120488"/>
+                <a:ext cx="118781" cy="112601"/>
+              </a:xfrm>
+              <a:prstGeom prst="line">
+                <a:avLst/>
+              </a:prstGeom>
+              <a:ln w="25400">
+                <a:solidFill>
+                  <a:schemeClr val="tx1"/>
+                </a:solidFill>
+              </a:ln>
+            </p:spPr>
+            <p:style>
+              <a:lnRef idx="1">
+                <a:schemeClr val="accent1"/>
+              </a:lnRef>
+              <a:fillRef idx="0">
+                <a:schemeClr val="accent1"/>
+              </a:fillRef>
+              <a:effectRef idx="0">
+                <a:schemeClr val="accent1"/>
+              </a:effectRef>
+              <a:fontRef idx="minor">
+                <a:schemeClr val="tx1"/>
+              </a:fontRef>
+            </p:style>
+          </p:cxnSp>
+          <p:cxnSp>
+            <p:nvCxnSpPr>
+              <p:cNvPr id="66" name="Straight Connector 65">
+                <a:extLst>
+                  <a:ext uri="{FF2B5EF4-FFF2-40B4-BE49-F238E27FC236}">
+                    <a16:creationId xmlns:a16="http://schemas.microsoft.com/office/drawing/2014/main" id="{6D258F8C-6F02-CF1A-0CC2-1ADB90A01895}"/>
+                  </a:ext>
+                </a:extLst>
+              </p:cNvPr>
+              <p:cNvCxnSpPr>
+                <a:cxnSpLocks/>
+              </p:cNvCxnSpPr>
+              <p:nvPr/>
+            </p:nvCxnSpPr>
+            <p:spPr>
+              <a:xfrm flipH="1">
+                <a:off x="2102644" y="4120488"/>
+                <a:ext cx="743149" cy="0"/>
+              </a:xfrm>
+              <a:prstGeom prst="line">
+                <a:avLst/>
+              </a:prstGeom>
+              <a:ln w="25400">
+                <a:solidFill>
+                  <a:schemeClr val="tx1"/>
+                </a:solidFill>
+              </a:ln>
+            </p:spPr>
+            <p:style>
+              <a:lnRef idx="1">
+                <a:schemeClr val="accent1"/>
+              </a:lnRef>
+              <a:fillRef idx="0">
+                <a:schemeClr val="accent1"/>
+              </a:fillRef>
+              <a:effectRef idx="0">
+                <a:schemeClr val="accent1"/>
+              </a:effectRef>
+              <a:fontRef idx="minor">
+                <a:schemeClr val="tx1"/>
+              </a:fontRef>
+            </p:style>
+          </p:cxnSp>
+          <p:cxnSp>
+            <p:nvCxnSpPr>
+              <p:cNvPr id="67" name="Straight Connector 66">
+                <a:extLst>
+                  <a:ext uri="{FF2B5EF4-FFF2-40B4-BE49-F238E27FC236}">
+                    <a16:creationId xmlns:a16="http://schemas.microsoft.com/office/drawing/2014/main" id="{911495A2-DC82-AF62-F71B-C480E12C0AFF}"/>
+                  </a:ext>
+                </a:extLst>
+              </p:cNvPr>
+              <p:cNvCxnSpPr>
+                <a:cxnSpLocks/>
+                <a:stCxn id="82" idx="0"/>
+              </p:cNvCxnSpPr>
+              <p:nvPr/>
+            </p:nvCxnSpPr>
+            <p:spPr>
+              <a:xfrm flipV="1">
+                <a:off x="2842874" y="4120488"/>
+                <a:ext cx="5839" cy="272938"/>
+              </a:xfrm>
+              <a:prstGeom prst="line">
+                <a:avLst/>
+              </a:prstGeom>
+              <a:ln w="25400">
+                <a:solidFill>
+                  <a:schemeClr val="tx1"/>
+                </a:solidFill>
+              </a:ln>
+            </p:spPr>
+            <p:style>
+              <a:lnRef idx="1">
+                <a:schemeClr val="accent1"/>
+              </a:lnRef>
+              <a:fillRef idx="0">
+                <a:schemeClr val="accent1"/>
+              </a:fillRef>
+              <a:effectRef idx="0">
+                <a:schemeClr val="accent1"/>
+              </a:effectRef>
+              <a:fontRef idx="minor">
+                <a:schemeClr val="tx1"/>
+              </a:fontRef>
+            </p:style>
+          </p:cxnSp>
+          <p:cxnSp>
+            <p:nvCxnSpPr>
+              <p:cNvPr id="68" name="Straight Connector 67">
+                <a:extLst>
+                  <a:ext uri="{FF2B5EF4-FFF2-40B4-BE49-F238E27FC236}">
+                    <a16:creationId xmlns:a16="http://schemas.microsoft.com/office/drawing/2014/main" id="{5DC799CE-4E20-7CC3-9DA7-42C88480D02E}"/>
+                  </a:ext>
+                </a:extLst>
+              </p:cNvPr>
+              <p:cNvCxnSpPr/>
+              <p:nvPr/>
+            </p:nvCxnSpPr>
+            <p:spPr>
+              <a:xfrm>
+                <a:off x="1981482" y="4303525"/>
+                <a:ext cx="345793" cy="0"/>
+              </a:xfrm>
+              <a:prstGeom prst="line">
+                <a:avLst/>
+              </a:prstGeom>
+              <a:ln w="25400">
+                <a:solidFill>
+                  <a:schemeClr val="tx1"/>
+                </a:solidFill>
+              </a:ln>
+            </p:spPr>
+            <p:style>
+              <a:lnRef idx="1">
+                <a:schemeClr val="accent1"/>
+              </a:lnRef>
+              <a:fillRef idx="0">
+                <a:schemeClr val="accent1"/>
+              </a:fillRef>
+              <a:effectRef idx="0">
+                <a:schemeClr val="accent1"/>
+              </a:effectRef>
+              <a:fontRef idx="minor">
+                <a:schemeClr val="tx1"/>
+              </a:fontRef>
+            </p:style>
+          </p:cxnSp>
+          <p:cxnSp>
+            <p:nvCxnSpPr>
+              <p:cNvPr id="69" name="Straight Connector 68">
+                <a:extLst>
+                  <a:ext uri="{FF2B5EF4-FFF2-40B4-BE49-F238E27FC236}">
+                    <a16:creationId xmlns:a16="http://schemas.microsoft.com/office/drawing/2014/main" id="{F3F34C14-31CA-D403-5F29-80F6C7EDB82B}"/>
+                  </a:ext>
+                </a:extLst>
+              </p:cNvPr>
+              <p:cNvCxnSpPr>
+                <a:cxnSpLocks/>
+              </p:cNvCxnSpPr>
+              <p:nvPr/>
+            </p:nvCxnSpPr>
+            <p:spPr>
+              <a:xfrm flipV="1">
+                <a:off x="2313356" y="4120488"/>
+                <a:ext cx="214398" cy="183037"/>
+              </a:xfrm>
+              <a:prstGeom prst="line">
+                <a:avLst/>
+              </a:prstGeom>
+              <a:ln w="25400">
+                <a:solidFill>
+                  <a:schemeClr val="tx1"/>
+                </a:solidFill>
+              </a:ln>
+            </p:spPr>
+            <p:style>
+              <a:lnRef idx="1">
+                <a:schemeClr val="accent1"/>
+              </a:lnRef>
+              <a:fillRef idx="0">
+                <a:schemeClr val="accent1"/>
+              </a:fillRef>
+              <a:effectRef idx="0">
+                <a:schemeClr val="accent1"/>
+              </a:effectRef>
+              <a:fontRef idx="minor">
+                <a:schemeClr val="tx1"/>
+              </a:fontRef>
+            </p:style>
+          </p:cxnSp>
+          <p:cxnSp>
+            <p:nvCxnSpPr>
+              <p:cNvPr id="70" name="Straight Connector 69">
+                <a:extLst>
+                  <a:ext uri="{FF2B5EF4-FFF2-40B4-BE49-F238E27FC236}">
+                    <a16:creationId xmlns:a16="http://schemas.microsoft.com/office/drawing/2014/main" id="{4611E1B4-EE52-15B1-5829-41573B772D65}"/>
+                  </a:ext>
+                </a:extLst>
+              </p:cNvPr>
+              <p:cNvCxnSpPr>
+                <a:cxnSpLocks/>
+              </p:cNvCxnSpPr>
+              <p:nvPr/>
+            </p:nvCxnSpPr>
+            <p:spPr>
+              <a:xfrm flipV="1">
+                <a:off x="2396967" y="3874689"/>
+                <a:ext cx="0" cy="235848"/>
+              </a:xfrm>
+              <a:prstGeom prst="line">
+                <a:avLst/>
+              </a:prstGeom>
+              <a:ln w="25400">
+                <a:solidFill>
+                  <a:schemeClr val="tx1"/>
+                </a:solidFill>
+              </a:ln>
+            </p:spPr>
+            <p:style>
+              <a:lnRef idx="1">
+                <a:schemeClr val="accent1"/>
+              </a:lnRef>
+              <a:fillRef idx="0">
+                <a:schemeClr val="accent1"/>
+              </a:fillRef>
+              <a:effectRef idx="0">
+                <a:schemeClr val="accent1"/>
+              </a:effectRef>
+              <a:fontRef idx="minor">
+                <a:schemeClr val="tx1"/>
+              </a:fontRef>
+            </p:style>
+          </p:cxnSp>
+          <p:cxnSp>
+            <p:nvCxnSpPr>
+              <p:cNvPr id="71" name="Straight Connector 70">
+                <a:extLst>
+                  <a:ext uri="{FF2B5EF4-FFF2-40B4-BE49-F238E27FC236}">
+                    <a16:creationId xmlns:a16="http://schemas.microsoft.com/office/drawing/2014/main" id="{AD2C2091-0FC4-8FB3-2558-863258BFBAC8}"/>
+                  </a:ext>
+                </a:extLst>
+              </p:cNvPr>
+              <p:cNvCxnSpPr>
+                <a:cxnSpLocks/>
+              </p:cNvCxnSpPr>
+              <p:nvPr/>
+            </p:nvCxnSpPr>
+            <p:spPr>
+              <a:xfrm flipV="1">
+                <a:off x="2615571" y="3874689"/>
+                <a:ext cx="0" cy="235848"/>
+              </a:xfrm>
+              <a:prstGeom prst="line">
+                <a:avLst/>
+              </a:prstGeom>
+              <a:ln w="25400">
+                <a:solidFill>
+                  <a:schemeClr val="tx1"/>
+                </a:solidFill>
+              </a:ln>
+            </p:spPr>
+            <p:style>
+              <a:lnRef idx="1">
+                <a:schemeClr val="accent1"/>
+              </a:lnRef>
+              <a:fillRef idx="0">
+                <a:schemeClr val="accent1"/>
+              </a:fillRef>
+              <a:effectRef idx="0">
+                <a:schemeClr val="accent1"/>
+              </a:effectRef>
+              <a:fontRef idx="minor">
+                <a:schemeClr val="tx1"/>
+              </a:fontRef>
+            </p:style>
+          </p:cxnSp>
+          <p:sp>
+            <p:nvSpPr>
+              <p:cNvPr id="72" name="Oval 71">
+                <a:extLst>
+                  <a:ext uri="{FF2B5EF4-FFF2-40B4-BE49-F238E27FC236}">
+                    <a16:creationId xmlns:a16="http://schemas.microsoft.com/office/drawing/2014/main" id="{D368E8EE-C050-6563-4FEC-A47CE27E4E29}"/>
+                  </a:ext>
+                </a:extLst>
+              </p:cNvPr>
+              <p:cNvSpPr>
+                <a:spLocks noChangeAspect="1"/>
+              </p:cNvSpPr>
+              <p:nvPr/>
+            </p:nvSpPr>
+            <p:spPr>
+              <a:xfrm>
+                <a:off x="2494458" y="3687481"/>
+                <a:ext cx="200126" cy="201267"/>
+              </a:xfrm>
+              <a:prstGeom prst="ellipse">
+                <a:avLst/>
+              </a:prstGeom>
+              <a:noFill/>
+              <a:ln w="25400"/>
+            </p:spPr>
+            <p:style>
+              <a:lnRef idx="2">
+                <a:schemeClr val="accent1">
+                  <a:shade val="15000"/>
+                </a:schemeClr>
+              </a:lnRef>
+              <a:fillRef idx="1">
+                <a:schemeClr val="accent1"/>
+              </a:fillRef>
+              <a:effectRef idx="0">
+                <a:schemeClr val="accent1"/>
+              </a:effectRef>
+              <a:fontRef idx="minor">
+                <a:schemeClr val="lt1"/>
+              </a:fontRef>
+            </p:style>
+            <p:txBody>
+              <a:bodyPr rtlCol="0" anchor="ctr"/>
+              <a:lstStyle/>
+              <a:p>
+                <a:pPr algn="ctr"/>
+                <a:endParaRPr lang="en-US" dirty="0"/>
+              </a:p>
+            </p:txBody>
+          </p:sp>
+          <p:sp>
+            <p:nvSpPr>
+              <p:cNvPr id="73" name="Oval 72">
+                <a:extLst>
+                  <a:ext uri="{FF2B5EF4-FFF2-40B4-BE49-F238E27FC236}">
+                    <a16:creationId xmlns:a16="http://schemas.microsoft.com/office/drawing/2014/main" id="{36A04E81-FFA0-6048-7EF1-58D6856904CA}"/>
+                  </a:ext>
+                </a:extLst>
+              </p:cNvPr>
+              <p:cNvSpPr>
+                <a:spLocks noChangeAspect="1"/>
+              </p:cNvSpPr>
+              <p:nvPr/>
+            </p:nvSpPr>
+            <p:spPr>
+              <a:xfrm>
+                <a:off x="2074531" y="3732390"/>
+                <a:ext cx="131835" cy="132589"/>
+              </a:xfrm>
+              <a:prstGeom prst="ellipse">
+                <a:avLst/>
+              </a:prstGeom>
+              <a:noFill/>
+              <a:ln w="25400"/>
+            </p:spPr>
+            <p:style>
+              <a:lnRef idx="2">
+                <a:schemeClr val="accent1">
+                  <a:shade val="15000"/>
+                </a:schemeClr>
+              </a:lnRef>
+              <a:fillRef idx="1">
+                <a:schemeClr val="accent1"/>
+              </a:fillRef>
+              <a:effectRef idx="0">
+                <a:schemeClr val="accent1"/>
+              </a:effectRef>
+              <a:fontRef idx="minor">
+                <a:schemeClr val="lt1"/>
+              </a:fontRef>
+            </p:style>
+            <p:txBody>
+              <a:bodyPr rtlCol="0" anchor="ctr"/>
+              <a:lstStyle/>
+              <a:p>
+                <a:pPr algn="ctr"/>
+                <a:endParaRPr lang="en-US" dirty="0"/>
+              </a:p>
+            </p:txBody>
+          </p:sp>
+          <p:cxnSp>
+            <p:nvCxnSpPr>
+              <p:cNvPr id="74" name="Straight Connector 73">
+                <a:extLst>
+                  <a:ext uri="{FF2B5EF4-FFF2-40B4-BE49-F238E27FC236}">
+                    <a16:creationId xmlns:a16="http://schemas.microsoft.com/office/drawing/2014/main" id="{EF7D566D-F89A-6B29-7140-F54C3A0788E5}"/>
+                  </a:ext>
+                </a:extLst>
+              </p:cNvPr>
+              <p:cNvCxnSpPr>
+                <a:stCxn id="72" idx="4"/>
+                <a:endCxn id="73" idx="4"/>
+              </p:cNvCxnSpPr>
+              <p:nvPr/>
+            </p:nvCxnSpPr>
+            <p:spPr>
+              <a:xfrm flipH="1" flipV="1">
+                <a:off x="2140449" y="3864979"/>
+                <a:ext cx="454072" cy="23769"/>
+              </a:xfrm>
+              <a:prstGeom prst="line">
+                <a:avLst/>
+              </a:prstGeom>
+              <a:ln w="25400">
+                <a:solidFill>
+                  <a:schemeClr val="tx1"/>
+                </a:solidFill>
+              </a:ln>
+            </p:spPr>
+            <p:style>
+              <a:lnRef idx="1">
+                <a:schemeClr val="accent1"/>
+              </a:lnRef>
+              <a:fillRef idx="0">
+                <a:schemeClr val="accent1"/>
+              </a:fillRef>
+              <a:effectRef idx="0">
+                <a:schemeClr val="accent1"/>
+              </a:effectRef>
+              <a:fontRef idx="minor">
+                <a:schemeClr val="tx1"/>
+              </a:fontRef>
+            </p:style>
+          </p:cxnSp>
+          <p:cxnSp>
+            <p:nvCxnSpPr>
+              <p:cNvPr id="75" name="Straight Connector 74">
+                <a:extLst>
+                  <a:ext uri="{FF2B5EF4-FFF2-40B4-BE49-F238E27FC236}">
+                    <a16:creationId xmlns:a16="http://schemas.microsoft.com/office/drawing/2014/main" id="{6D767579-9F7D-F5E3-5F95-B85C5FD3AE15}"/>
+                  </a:ext>
+                </a:extLst>
+              </p:cNvPr>
+              <p:cNvCxnSpPr>
+                <a:cxnSpLocks/>
+                <a:stCxn id="72" idx="0"/>
+                <a:endCxn id="73" idx="0"/>
+              </p:cNvCxnSpPr>
+              <p:nvPr/>
+            </p:nvCxnSpPr>
+            <p:spPr>
+              <a:xfrm flipH="1">
+                <a:off x="2140450" y="3687481"/>
+                <a:ext cx="454071" cy="44910"/>
+              </a:xfrm>
+              <a:prstGeom prst="line">
+                <a:avLst/>
+              </a:prstGeom>
+              <a:ln w="25400">
+                <a:solidFill>
+                  <a:schemeClr val="tx1"/>
+                </a:solidFill>
+              </a:ln>
+            </p:spPr>
+            <p:style>
+              <a:lnRef idx="1">
+                <a:schemeClr val="accent1"/>
+              </a:lnRef>
+              <a:fillRef idx="0">
+                <a:schemeClr val="accent1"/>
+              </a:fillRef>
+              <a:effectRef idx="0">
+                <a:schemeClr val="accent1"/>
+              </a:effectRef>
+              <a:fontRef idx="minor">
+                <a:schemeClr val="tx1"/>
+              </a:fontRef>
+            </p:style>
+          </p:cxnSp>
+          <p:cxnSp>
+            <p:nvCxnSpPr>
+              <p:cNvPr id="76" name="Straight Connector 75">
+                <a:extLst>
+                  <a:ext uri="{FF2B5EF4-FFF2-40B4-BE49-F238E27FC236}">
+                    <a16:creationId xmlns:a16="http://schemas.microsoft.com/office/drawing/2014/main" id="{C56760CE-87B8-3A01-FEC8-39C0FD957778}"/>
+                  </a:ext>
+                </a:extLst>
+              </p:cNvPr>
+              <p:cNvCxnSpPr>
+                <a:stCxn id="73" idx="2"/>
+              </p:cNvCxnSpPr>
+              <p:nvPr/>
+            </p:nvCxnSpPr>
+            <p:spPr>
+              <a:xfrm flipH="1" flipV="1">
+                <a:off x="1981482" y="3798684"/>
+                <a:ext cx="93049" cy="1"/>
+              </a:xfrm>
+              <a:prstGeom prst="line">
+                <a:avLst/>
+              </a:prstGeom>
+              <a:ln w="25400">
+                <a:solidFill>
+                  <a:schemeClr val="tx1"/>
+                </a:solidFill>
+              </a:ln>
+            </p:spPr>
+            <p:style>
+              <a:lnRef idx="1">
+                <a:schemeClr val="accent1"/>
+              </a:lnRef>
+              <a:fillRef idx="0">
+                <a:schemeClr val="accent1"/>
+              </a:fillRef>
+              <a:effectRef idx="0">
+                <a:schemeClr val="accent1"/>
+              </a:effectRef>
+              <a:fontRef idx="minor">
+                <a:schemeClr val="tx1"/>
+              </a:fontRef>
+            </p:style>
+          </p:cxnSp>
+          <p:cxnSp>
+            <p:nvCxnSpPr>
+              <p:cNvPr id="77" name="Straight Connector 76">
+                <a:extLst>
+                  <a:ext uri="{FF2B5EF4-FFF2-40B4-BE49-F238E27FC236}">
+                    <a16:creationId xmlns:a16="http://schemas.microsoft.com/office/drawing/2014/main" id="{0DF6C7D8-4B70-0A4A-C897-9B8DA6314087}"/>
+                  </a:ext>
+                </a:extLst>
+              </p:cNvPr>
+              <p:cNvCxnSpPr/>
+              <p:nvPr/>
+            </p:nvCxnSpPr>
+            <p:spPr>
+              <a:xfrm flipV="1">
+                <a:off x="1981482" y="3709935"/>
+                <a:ext cx="0" cy="164754"/>
+              </a:xfrm>
+              <a:prstGeom prst="line">
+                <a:avLst/>
+              </a:prstGeom>
+              <a:ln w="25400">
+                <a:solidFill>
+                  <a:schemeClr val="tx1"/>
+                </a:solidFill>
+              </a:ln>
+            </p:spPr>
+            <p:style>
+              <a:lnRef idx="1">
+                <a:schemeClr val="accent1"/>
+              </a:lnRef>
+              <a:fillRef idx="0">
+                <a:schemeClr val="accent1"/>
+              </a:fillRef>
+              <a:effectRef idx="0">
+                <a:schemeClr val="accent1"/>
+              </a:effectRef>
+              <a:fontRef idx="minor">
+                <a:schemeClr val="tx1"/>
+              </a:fontRef>
+            </p:style>
+          </p:cxnSp>
+          <p:cxnSp>
+            <p:nvCxnSpPr>
+              <p:cNvPr id="78" name="Straight Connector 77">
+                <a:extLst>
+                  <a:ext uri="{FF2B5EF4-FFF2-40B4-BE49-F238E27FC236}">
+                    <a16:creationId xmlns:a16="http://schemas.microsoft.com/office/drawing/2014/main" id="{D346F10E-0B5B-5AE0-606E-9A19B4A4FFEE}"/>
+                  </a:ext>
+                </a:extLst>
+              </p:cNvPr>
+              <p:cNvCxnSpPr/>
+              <p:nvPr/>
+            </p:nvCxnSpPr>
+            <p:spPr>
+              <a:xfrm flipH="1">
+                <a:off x="1840706" y="3709935"/>
+                <a:ext cx="140776" cy="33421"/>
+              </a:xfrm>
+              <a:prstGeom prst="line">
+                <a:avLst/>
+              </a:prstGeom>
+              <a:ln w="25400">
+                <a:solidFill>
+                  <a:schemeClr val="tx1"/>
+                </a:solidFill>
+              </a:ln>
+            </p:spPr>
+            <p:style>
+              <a:lnRef idx="1">
+                <a:schemeClr val="accent1"/>
+              </a:lnRef>
+              <a:fillRef idx="0">
+                <a:schemeClr val="accent1"/>
+              </a:fillRef>
+              <a:effectRef idx="0">
+                <a:schemeClr val="accent1"/>
+              </a:effectRef>
+              <a:fontRef idx="minor">
+                <a:schemeClr val="tx1"/>
+              </a:fontRef>
+            </p:style>
+          </p:cxnSp>
+          <p:cxnSp>
+            <p:nvCxnSpPr>
+              <p:cNvPr id="79" name="Straight Connector 78">
+                <a:extLst>
+                  <a:ext uri="{FF2B5EF4-FFF2-40B4-BE49-F238E27FC236}">
+                    <a16:creationId xmlns:a16="http://schemas.microsoft.com/office/drawing/2014/main" id="{BD6513DB-B39E-A51D-F801-EEA28822AE4E}"/>
+                  </a:ext>
+                </a:extLst>
+              </p:cNvPr>
+              <p:cNvCxnSpPr>
+                <a:cxnSpLocks/>
+              </p:cNvCxnSpPr>
+              <p:nvPr/>
+            </p:nvCxnSpPr>
+            <p:spPr>
+              <a:xfrm flipH="1" flipV="1">
+                <a:off x="1845353" y="3838066"/>
+                <a:ext cx="140776" cy="33421"/>
+              </a:xfrm>
+              <a:prstGeom prst="line">
+                <a:avLst/>
+              </a:prstGeom>
+              <a:ln w="25400">
+                <a:solidFill>
+                  <a:schemeClr val="tx1"/>
+                </a:solidFill>
+              </a:ln>
+            </p:spPr>
+            <p:style>
+              <a:lnRef idx="1">
+                <a:schemeClr val="accent1"/>
+              </a:lnRef>
+              <a:fillRef idx="0">
+                <a:schemeClr val="accent1"/>
+              </a:fillRef>
+              <a:effectRef idx="0">
+                <a:schemeClr val="accent1"/>
+              </a:effectRef>
+              <a:fontRef idx="minor">
+                <a:schemeClr val="tx1"/>
+              </a:fontRef>
+            </p:style>
+          </p:cxnSp>
+        </p:grpSp>
+        <p:pic>
+          <p:nvPicPr>
+            <p:cNvPr id="60" name="Graphic 59" descr="Wireless with solid fill">
+              <a:extLst>
+                <a:ext uri="{FF2B5EF4-FFF2-40B4-BE49-F238E27FC236}">
+                  <a16:creationId xmlns:a16="http://schemas.microsoft.com/office/drawing/2014/main" id="{8A93ED76-A9E7-2C63-BE7A-3BC2DB7AC5C8}"/>
+                </a:ext>
+              </a:extLst>
+            </p:cNvPr>
+            <p:cNvPicPr>
+              <a:picLocks noChangeAspect="1"/>
+            </p:cNvPicPr>
+            <p:nvPr/>
+          </p:nvPicPr>
+          <p:blipFill>
+            <a:blip>
+              <a:extLst>
+                <a:ext uri="{96DAC541-7B7A-43D3-8B79-37D633B846F1}">
+                  <asvg:svgBlip xmlns:asvg="http://schemas.microsoft.com/office/drawing/2016/SVG/main" r:embed="rId8"/>
+                </a:ext>
+              </a:extLst>
+            </a:blip>
+            <a:stretch>
+              <a:fillRect/>
+            </a:stretch>
+          </p:blipFill>
+          <p:spPr>
+            <a:xfrm rot="20955696">
+              <a:off x="4232021" y="2577311"/>
+              <a:ext cx="322586" cy="297515"/>
+            </a:xfrm>
+            <a:prstGeom prst="rect">
+              <a:avLst/>
+            </a:prstGeom>
+          </p:spPr>
+        </p:pic>
+      </p:grpSp>
+      <p:pic>
+        <p:nvPicPr>
+          <p:cNvPr id="85" name="Graphic 84" descr="Wireless with solid fill">
+            <a:extLst>
+              <a:ext uri="{FF2B5EF4-FFF2-40B4-BE49-F238E27FC236}">
+                <a16:creationId xmlns:a16="http://schemas.microsoft.com/office/drawing/2014/main" id="{54E01BD4-4E32-98ED-EADE-E44CD994B774}"/>
+              </a:ext>
+            </a:extLst>
+          </p:cNvPr>
+          <p:cNvPicPr>
+            <a:picLocks noChangeAspect="1"/>
+          </p:cNvPicPr>
+          <p:nvPr/>
+        </p:nvPicPr>
+        <p:blipFill>
+          <a:blip>
+            <a:extLst>
+              <a:ext uri="{96DAC541-7B7A-43D3-8B79-37D633B846F1}">
+                <asvg:svgBlip xmlns:asvg="http://schemas.microsoft.com/office/drawing/2016/SVG/main" r:embed="rId9"/>
+              </a:ext>
+            </a:extLst>
+          </a:blip>
+          <a:stretch>
+            <a:fillRect/>
+          </a:stretch>
+        </p:blipFill>
+        <p:spPr>
+          <a:xfrm>
+            <a:off x="4606846" y="2206452"/>
+            <a:ext cx="370160" cy="370160"/>
+          </a:xfrm>
+          <a:prstGeom prst="rect">
+            <a:avLst/>
+          </a:prstGeom>
+        </p:spPr>
+      </p:pic>
+    </p:spTree>
+    <p:extLst>
+      <p:ext uri="{BB962C8B-B14F-4D97-AF65-F5344CB8AC3E}">
+        <p14:creationId xmlns:p14="http://schemas.microsoft.com/office/powerpoint/2010/main" val="3315109910"/>
+      </p:ext>
+    </p:extLst>
+  </p:cSld>
+  <p:clrMapOvr>
+    <a:masterClrMapping/>
+  </p:clrMapOvr>
+</p:sld>
+</file>
+
+<file path=ppt/slides/slide2.xml><?xml version="1.0" encoding="utf-8"?>
+<p:sld xmlns:a="http://schemas.openxmlformats.org/drawingml/2006/main" xmlns:r="http://schemas.openxmlformats.org/officeDocument/2006/relationships" xmlns:p="http://schemas.openxmlformats.org/presentationml/2006/main">
+  <p:cSld>
+    <p:spTree>
+      <p:nvGrpSpPr>
+        <p:cNvPr id="1" name=""/>
+        <p:cNvGrpSpPr/>
+        <p:nvPr/>
+      </p:nvGrpSpPr>
+      <p:grpSpPr>
+        <a:xfrm>
+          <a:off x="0" y="0"/>
+          <a:ext cx="0" cy="0"/>
+          <a:chOff x="0" y="0"/>
+          <a:chExt cx="0" cy="0"/>
+        </a:xfrm>
+      </p:grpSpPr>
+      <p:sp>
+        <p:nvSpPr>
           <p:cNvPr id="8" name="TextBox 8">
             <a:extLst>
               <a:ext uri="{FF2B5EF4-FFF2-40B4-BE49-F238E27FC236}">
@@ -2998,8 +6618,8 @@
         </p:nvSpPr>
         <p:spPr>
           <a:xfrm>
-            <a:off x="887034" y="2374102"/>
-            <a:ext cx="1010379" cy="644877"/>
+            <a:off x="1855043" y="3000366"/>
+            <a:ext cx="2112992" cy="1348576"/>
           </a:xfrm>
           <a:prstGeom prst="rect">
             <a:avLst/>
@@ -3022,7 +6642,7 @@
           <a:fontRef idx="minor"/>
         </p:style>
         <p:txBody>
-          <a:bodyPr wrap="square" lIns="90000" tIns="45000" rIns="90000" bIns="45000" anchor="t">
+          <a:bodyPr wrap="square" lIns="188216" tIns="94108" rIns="188216" bIns="94108" anchor="t">
             <a:spAutoFit/>
           </a:bodyPr>
           <a:lstStyle/>
@@ -3034,7 +6654,7 @@
               <a:buNone/>
             </a:pPr>
             <a:r>
-              <a:rPr lang="en-US" spc="-1" dirty="0">
+              <a:rPr lang="en-US" sz="3764" spc="-3" dirty="0">
                 <a:solidFill>
                   <a:srgbClr val="000000"/>
                 </a:solidFill>
@@ -3051,7 +6671,7 @@
               <a:buNone/>
             </a:pPr>
             <a:r>
-              <a:rPr lang="en-US" spc="-1" dirty="0">
+              <a:rPr lang="en-US" sz="3764" spc="-3" dirty="0">
                 <a:solidFill>
                   <a:srgbClr val="000000"/>
                 </a:solidFill>
@@ -3059,7 +6679,7 @@
               </a:rPr>
               <a:t>User</a:t>
             </a:r>
-            <a:endParaRPr lang="en-US" spc="-1" dirty="0">
+            <a:endParaRPr lang="en-US" sz="3764" spc="-3" dirty="0">
               <a:latin typeface="Arial"/>
             </a:endParaRPr>
           </a:p>
@@ -3079,8 +6699,8 @@
         </p:nvGrpSpPr>
         <p:grpSpPr>
           <a:xfrm>
-            <a:off x="1511310" y="2663329"/>
-            <a:ext cx="1381669" cy="907889"/>
+            <a:off x="3160584" y="3605224"/>
+            <a:ext cx="2889465" cy="1898656"/>
             <a:chOff x="736556" y="3669699"/>
             <a:chExt cx="2211302" cy="1167122"/>
           </a:xfrm>
@@ -3137,7 +6757,7 @@
             <a:lstStyle/>
             <a:p>
               <a:pPr algn="ctr"/>
-              <a:endParaRPr lang="en-DE"/>
+              <a:endParaRPr lang="en-DE" sz="3764"/>
             </a:p>
           </p:txBody>
         </p:sp>
@@ -3185,10 +6805,10 @@
             <p:nvPr/>
           </p:nvPicPr>
           <p:blipFill>
-            <a:blip r:embed="rId3">
+            <a:blip>
               <a:extLst>
                 <a:ext uri="{96DAC541-7B7A-43D3-8B79-37D633B846F1}">
-                  <asvg:svgBlip xmlns:asvg="http://schemas.microsoft.com/office/drawing/2016/SVG/main" r:embed="rId4"/>
+                  <asvg:svgBlip xmlns:asvg="http://schemas.microsoft.com/office/drawing/2016/SVG/main" r:embed="rId3"/>
                 </a:ext>
               </a:extLst>
             </a:blip>
@@ -3222,10 +6842,10 @@
           <p:nvPr/>
         </p:nvPicPr>
         <p:blipFill>
-          <a:blip r:embed="rId5">
+          <a:blip>
             <a:extLst>
               <a:ext uri="{96DAC541-7B7A-43D3-8B79-37D633B846F1}">
-                <asvg:svgBlip xmlns:asvg="http://schemas.microsoft.com/office/drawing/2016/SVG/main" r:embed="rId6"/>
+                <asvg:svgBlip xmlns:asvg="http://schemas.microsoft.com/office/drawing/2016/SVG/main" r:embed="rId4"/>
               </a:ext>
             </a:extLst>
           </a:blip>
@@ -3235,8 +6855,8 @@
         </p:blipFill>
         <p:spPr>
           <a:xfrm>
-            <a:off x="680501" y="1503205"/>
-            <a:ext cx="376677" cy="376677"/>
+            <a:off x="1423123" y="1179072"/>
+            <a:ext cx="787740" cy="787740"/>
           </a:xfrm>
           <a:prstGeom prst="rect">
             <a:avLst/>
@@ -3257,8 +6877,8 @@
         </p:nvSpPr>
         <p:spPr>
           <a:xfrm>
-            <a:off x="714789" y="-32258"/>
-            <a:ext cx="683491" cy="369332"/>
+            <a:off x="1494829" y="-1431946"/>
+            <a:ext cx="1429376" cy="671594"/>
           </a:xfrm>
           <a:prstGeom prst="rect">
             <a:avLst/>
@@ -3273,7 +6893,7 @@
           <a:p>
             <a:pPr algn="ctr"/>
             <a:r>
-              <a:rPr lang="en-US" spc="-1" dirty="0">
+              <a:rPr lang="en-US" sz="3764" spc="-3" dirty="0">
                 <a:solidFill>
                   <a:srgbClr val="000000"/>
                 </a:solidFill>
@@ -3281,7 +6901,7 @@
               </a:rPr>
               <a:t>SIM</a:t>
             </a:r>
-            <a:endParaRPr lang="en-DE" dirty="0"/>
+            <a:endParaRPr lang="en-DE" sz="3764" dirty="0"/>
           </a:p>
         </p:txBody>
       </p:sp>
@@ -3299,8 +6919,8 @@
         </p:nvGrpSpPr>
         <p:grpSpPr>
           <a:xfrm>
-            <a:off x="232281" y="454225"/>
-            <a:ext cx="623653" cy="669179"/>
+            <a:off x="485767" y="-1014646"/>
+            <a:ext cx="1304237" cy="1399445"/>
             <a:chOff x="94594" y="1868587"/>
             <a:chExt cx="623653" cy="669179"/>
           </a:xfrm>
@@ -4464,15 +8084,15 @@
           <p:nvPr/>
         </p:nvPicPr>
         <p:blipFill>
-          <a:blip r:embed="rId7"/>
+          <a:blip r:embed="rId5"/>
           <a:stretch>
             <a:fillRect/>
           </a:stretch>
         </p:blipFill>
         <p:spPr>
           <a:xfrm>
-            <a:off x="965697" y="349682"/>
-            <a:ext cx="1152529" cy="1181800"/>
+            <a:off x="2019551" y="-1233277"/>
+            <a:ext cx="2410268" cy="2471483"/>
           </a:xfrm>
           <a:prstGeom prst="rect">
             <a:avLst/>
@@ -4494,10 +8114,10 @@
           <p:nvPr/>
         </p:nvPicPr>
         <p:blipFill>
-          <a:blip r:embed="rId8">
+          <a:blip>
             <a:extLst>
               <a:ext uri="{96DAC541-7B7A-43D3-8B79-37D633B846F1}">
-                <asvg:svgBlip xmlns:asvg="http://schemas.microsoft.com/office/drawing/2016/SVG/main" r:embed="rId9"/>
+                <asvg:svgBlip xmlns:asvg="http://schemas.microsoft.com/office/drawing/2016/SVG/main" r:embed="rId6"/>
               </a:ext>
             </a:extLst>
           </a:blip>
@@ -4507,8 +8127,8 @@
         </p:blipFill>
         <p:spPr>
           <a:xfrm rot="629927">
-            <a:off x="2219760" y="2053179"/>
-            <a:ext cx="443334" cy="443334"/>
+            <a:off x="4642153" y="2329224"/>
+            <a:ext cx="927139" cy="927139"/>
           </a:xfrm>
           <a:prstGeom prst="rect">
             <a:avLst/>
@@ -4529,8 +8149,8 @@
         </p:nvSpPr>
         <p:spPr>
           <a:xfrm>
-            <a:off x="68542" y="1486839"/>
-            <a:ext cx="683491" cy="369332"/>
+            <a:off x="143341" y="1144847"/>
+            <a:ext cx="1429376" cy="671594"/>
           </a:xfrm>
           <a:prstGeom prst="rect">
             <a:avLst/>
@@ -4545,7 +8165,7 @@
           <a:p>
             <a:pPr algn="ctr"/>
             <a:r>
-              <a:rPr lang="en-US" spc="-1" dirty="0">
+              <a:rPr lang="en-US" sz="3764" spc="-3" dirty="0">
                 <a:solidFill>
                   <a:srgbClr val="000000"/>
                 </a:solidFill>
@@ -4553,7 +8173,7 @@
               </a:rPr>
               <a:t>FPGA</a:t>
             </a:r>
-            <a:endParaRPr lang="en-DE" dirty="0"/>
+            <a:endParaRPr lang="en-DE" sz="3764" dirty="0"/>
           </a:p>
         </p:txBody>
       </p:sp>
@@ -4571,8 +8191,8 @@
         </p:nvSpPr>
         <p:spPr>
           <a:xfrm>
-            <a:off x="0" y="277818"/>
-            <a:ext cx="2209800" cy="1602064"/>
+            <a:off x="1" y="-1383564"/>
+            <a:ext cx="4621324" cy="3350375"/>
           </a:xfrm>
           <a:prstGeom prst="rect">
             <a:avLst/>
@@ -4603,7 +8223,7 @@
           <a:lstStyle/>
           <a:p>
             <a:pPr algn="ctr"/>
-            <a:endParaRPr lang="LID4096"/>
+            <a:endParaRPr lang="LID4096" sz="3764"/>
           </a:p>
         </p:txBody>
       </p:sp>
